--- a/2-seances/S04-le-jeu-compte/a-projeter/quiz-rappel.pptx
+++ b/2-seances/S04-le-jeu-compte/a-projeter/quiz-rappel.pptx
@@ -19,13 +19,9 @@
     <p:sldId id="267" r:id="rId13"/>
     <p:sldId id="268" r:id="rId14"/>
     <p:sldId id="269" r:id="rId15"/>
-    <p:sldId id="270" r:id="rId16"/>
-    <p:sldId id="271" r:id="rId17"/>
-    <p:sldId id="272" r:id="rId18"/>
-    <p:sldId id="273" r:id="rId19"/>
   </p:sldIdLst>
   <p:notesMasterIdLst>
-    <p:notesMasterId r:id="rId20"/>
+    <p:notesMasterId r:id="rId16"/>
   </p:notesMasterIdLst>
   <p:sldSz cx="12192000" cy="6858000"/>
   <p:notesSz cx="6858000" cy="12192000"/>
@@ -959,7 +955,7 @@
           <a:p>
             <a:r>
               <a:rPr lang="en-US" dirty="0"/>
-              <a:t>Je lis, « 3, 2, 1 — cartes en l'air », je compte à vue. JE NE COMMENTE AUCUN RÉSULTAT INDIVIDUEL du test : le score est pour moi seul.</a:t>
+              <a:t>Transition directe vers le live coding : on enchaîne sans pause. La derniere question est le pont vers le live coding.</a:t>
             </a:r>
             <a:endParaRPr lang="en-US" dirty="0"/>
           </a:p>
@@ -983,358 +979,6 @@
             <a:fld id="{F7021451-1387-4CA6-816F-3879F97B5CBC}" type="slidenum">
               <a:rPr lang="en-US"/>
               <a:t>14</a:t>
-            </a:fld>
-            <a:endParaRPr lang="en-US"/>
-          </a:p>
-        </p:txBody>
-      </p:sp>
-    </p:spTree>
-    <p:extLst>
-      <p:ext uri="{BB962C8B-B14F-4D97-AF65-F5344CB8AC3E}">
-        <p14:creationId xmlns:p14="http://schemas.microsoft.com/office/powerpoint/2010/main" val="1024086991"/>
-      </p:ext>
-    </p:extLst>
-  </p:cSld>
-  <p:clrMapOvr>
-    <a:masterClrMapping/>
-  </p:clrMapOvr>
-</p:notes>
-</file>
-
-<file path=ppt/notesSlides/notesSlide15.xml><?xml version="1.0" encoding="utf-8"?>
-<p:notes xmlns:a="http://schemas.openxmlformats.org/drawingml/2006/main" xmlns:r="http://schemas.openxmlformats.org/officeDocument/2006/relationships" xmlns:p="http://schemas.openxmlformats.org/presentationml/2006/main">
-  <p:cSld>
-    <p:spTree>
-      <p:nvGrpSpPr>
-        <p:cNvPr id="1" name=""/>
-        <p:cNvGrpSpPr/>
-        <p:nvPr/>
-      </p:nvGrpSpPr>
-      <p:grpSpPr>
-        <a:xfrm>
-          <a:off x="0" y="0"/>
-          <a:ext cx="0" cy="0"/>
-          <a:chOff x="0" y="0"/>
-          <a:chExt cx="0" cy="0"/>
-        </a:xfrm>
-      </p:grpSpPr>
-      <p:sp>
-        <p:nvSpPr>
-          <p:cNvPr id="2" name="Slide Image Placeholder 1"/>
-          <p:cNvSpPr>
-            <a:spLocks noGrp="1" noRot="1" noChangeAspect="1"/>
-          </p:cNvSpPr>
-          <p:nvPr>
-            <p:ph type="sldImg"/>
-          </p:nvPr>
-        </p:nvSpPr>
-        <p:spPr/>
-      </p:sp>
-      <p:sp>
-        <p:nvSpPr>
-          <p:cNvPr id="3" name="Notes Placeholder 2"/>
-          <p:cNvSpPr>
-            <a:spLocks noGrp="1"/>
-          </p:cNvSpPr>
-          <p:nvPr>
-            <p:ph type="body" idx="1"/>
-          </p:nvPr>
-        </p:nvSpPr>
-        <p:spPr/>
-        <p:txBody>
-          <a:bodyPr/>
-          <a:lstStyle/>
-          <a:p>
-            <a:r>
-              <a:rPr lang="en-US" dirty="0"/>
-              <a:t>Je dis cette phrase d'explication à voix haute. C'est ce qui transforme le jeu en enseignement. Puis je passe à la question suivante.</a:t>
-            </a:r>
-            <a:endParaRPr lang="en-US" dirty="0"/>
-          </a:p>
-        </p:txBody>
-      </p:sp>
-      <p:sp>
-        <p:nvSpPr>
-          <p:cNvPr id="4" name="Slide Number Placeholder 3"/>
-          <p:cNvSpPr>
-            <a:spLocks noGrp="1"/>
-          </p:cNvSpPr>
-          <p:nvPr>
-            <p:ph type="sldNum" sz="quarter" idx="10"/>
-          </p:nvPr>
-        </p:nvSpPr>
-        <p:spPr/>
-        <p:txBody>
-          <a:bodyPr/>
-          <a:lstStyle/>
-          <a:p>
-            <a:fld id="{F7021451-1387-4CA6-816F-3879F97B5CBC}" type="slidenum">
-              <a:rPr lang="en-US"/>
-              <a:t>15</a:t>
-            </a:fld>
-            <a:endParaRPr lang="en-US"/>
-          </a:p>
-        </p:txBody>
-      </p:sp>
-    </p:spTree>
-    <p:extLst>
-      <p:ext uri="{BB962C8B-B14F-4D97-AF65-F5344CB8AC3E}">
-        <p14:creationId xmlns:p14="http://schemas.microsoft.com/office/powerpoint/2010/main" val="1024086991"/>
-      </p:ext>
-    </p:extLst>
-  </p:cSld>
-  <p:clrMapOvr>
-    <a:masterClrMapping/>
-  </p:clrMapOvr>
-</p:notes>
-</file>
-
-<file path=ppt/notesSlides/notesSlide16.xml><?xml version="1.0" encoding="utf-8"?>
-<p:notes xmlns:a="http://schemas.openxmlformats.org/drawingml/2006/main" xmlns:r="http://schemas.openxmlformats.org/officeDocument/2006/relationships" xmlns:p="http://schemas.openxmlformats.org/presentationml/2006/main">
-  <p:cSld>
-    <p:spTree>
-      <p:nvGrpSpPr>
-        <p:cNvPr id="1" name=""/>
-        <p:cNvGrpSpPr/>
-        <p:nvPr/>
-      </p:nvGrpSpPr>
-      <p:grpSpPr>
-        <a:xfrm>
-          <a:off x="0" y="0"/>
-          <a:ext cx="0" cy="0"/>
-          <a:chOff x="0" y="0"/>
-          <a:chExt cx="0" cy="0"/>
-        </a:xfrm>
-      </p:grpSpPr>
-      <p:sp>
-        <p:nvSpPr>
-          <p:cNvPr id="2" name="Slide Image Placeholder 1"/>
-          <p:cNvSpPr>
-            <a:spLocks noGrp="1" noRot="1" noChangeAspect="1"/>
-          </p:cNvSpPr>
-          <p:nvPr>
-            <p:ph type="sldImg"/>
-          </p:nvPr>
-        </p:nvSpPr>
-        <p:spPr/>
-      </p:sp>
-      <p:sp>
-        <p:nvSpPr>
-          <p:cNvPr id="3" name="Notes Placeholder 2"/>
-          <p:cNvSpPr>
-            <a:spLocks noGrp="1"/>
-          </p:cNvSpPr>
-          <p:nvPr>
-            <p:ph type="body" idx="1"/>
-          </p:nvPr>
-        </p:nvSpPr>
-        <p:spPr/>
-        <p:txBody>
-          <a:bodyPr/>
-          <a:lstStyle/>
-          <a:p>
-            <a:r>
-              <a:rPr lang="en-US" dirty="0"/>
-              <a:t>Je lis, « 3, 2, 1 — cartes en l'air », je compte à vue. JE NE COMMENTE AUCUN RÉSULTAT INDIVIDUEL du test : le score est pour moi seul.</a:t>
-            </a:r>
-            <a:endParaRPr lang="en-US" dirty="0"/>
-          </a:p>
-        </p:txBody>
-      </p:sp>
-      <p:sp>
-        <p:nvSpPr>
-          <p:cNvPr id="4" name="Slide Number Placeholder 3"/>
-          <p:cNvSpPr>
-            <a:spLocks noGrp="1"/>
-          </p:cNvSpPr>
-          <p:nvPr>
-            <p:ph type="sldNum" sz="quarter" idx="10"/>
-          </p:nvPr>
-        </p:nvSpPr>
-        <p:spPr/>
-        <p:txBody>
-          <a:bodyPr/>
-          <a:lstStyle/>
-          <a:p>
-            <a:fld id="{F7021451-1387-4CA6-816F-3879F97B5CBC}" type="slidenum">
-              <a:rPr lang="en-US"/>
-              <a:t>16</a:t>
-            </a:fld>
-            <a:endParaRPr lang="en-US"/>
-          </a:p>
-        </p:txBody>
-      </p:sp>
-    </p:spTree>
-    <p:extLst>
-      <p:ext uri="{BB962C8B-B14F-4D97-AF65-F5344CB8AC3E}">
-        <p14:creationId xmlns:p14="http://schemas.microsoft.com/office/powerpoint/2010/main" val="1024086991"/>
-      </p:ext>
-    </p:extLst>
-  </p:cSld>
-  <p:clrMapOvr>
-    <a:masterClrMapping/>
-  </p:clrMapOvr>
-</p:notes>
-</file>
-
-<file path=ppt/notesSlides/notesSlide17.xml><?xml version="1.0" encoding="utf-8"?>
-<p:notes xmlns:a="http://schemas.openxmlformats.org/drawingml/2006/main" xmlns:r="http://schemas.openxmlformats.org/officeDocument/2006/relationships" xmlns:p="http://schemas.openxmlformats.org/presentationml/2006/main">
-  <p:cSld>
-    <p:spTree>
-      <p:nvGrpSpPr>
-        <p:cNvPr id="1" name=""/>
-        <p:cNvGrpSpPr/>
-        <p:nvPr/>
-      </p:nvGrpSpPr>
-      <p:grpSpPr>
-        <a:xfrm>
-          <a:off x="0" y="0"/>
-          <a:ext cx="0" cy="0"/>
-          <a:chOff x="0" y="0"/>
-          <a:chExt cx="0" cy="0"/>
-        </a:xfrm>
-      </p:grpSpPr>
-      <p:sp>
-        <p:nvSpPr>
-          <p:cNvPr id="2" name="Slide Image Placeholder 1"/>
-          <p:cNvSpPr>
-            <a:spLocks noGrp="1" noRot="1" noChangeAspect="1"/>
-          </p:cNvSpPr>
-          <p:nvPr>
-            <p:ph type="sldImg"/>
-          </p:nvPr>
-        </p:nvSpPr>
-        <p:spPr/>
-      </p:sp>
-      <p:sp>
-        <p:nvSpPr>
-          <p:cNvPr id="3" name="Notes Placeholder 2"/>
-          <p:cNvSpPr>
-            <a:spLocks noGrp="1"/>
-          </p:cNvSpPr>
-          <p:nvPr>
-            <p:ph type="body" idx="1"/>
-          </p:nvPr>
-        </p:nvSpPr>
-        <p:spPr/>
-        <p:txBody>
-          <a:bodyPr/>
-          <a:lstStyle/>
-          <a:p>
-            <a:r>
-              <a:rPr lang="en-US" dirty="0"/>
-              <a:t>Je dis cette phrase d'explication à voix haute. C'est ce qui transforme le jeu en enseignement. Puis je passe à la question suivante.</a:t>
-            </a:r>
-            <a:endParaRPr lang="en-US" dirty="0"/>
-          </a:p>
-        </p:txBody>
-      </p:sp>
-      <p:sp>
-        <p:nvSpPr>
-          <p:cNvPr id="4" name="Slide Number Placeholder 3"/>
-          <p:cNvSpPr>
-            <a:spLocks noGrp="1"/>
-          </p:cNvSpPr>
-          <p:nvPr>
-            <p:ph type="sldNum" sz="quarter" idx="10"/>
-          </p:nvPr>
-        </p:nvSpPr>
-        <p:spPr/>
-        <p:txBody>
-          <a:bodyPr/>
-          <a:lstStyle/>
-          <a:p>
-            <a:fld id="{F7021451-1387-4CA6-816F-3879F97B5CBC}" type="slidenum">
-              <a:rPr lang="en-US"/>
-              <a:t>17</a:t>
-            </a:fld>
-            <a:endParaRPr lang="en-US"/>
-          </a:p>
-        </p:txBody>
-      </p:sp>
-    </p:spTree>
-    <p:extLst>
-      <p:ext uri="{BB962C8B-B14F-4D97-AF65-F5344CB8AC3E}">
-        <p14:creationId xmlns:p14="http://schemas.microsoft.com/office/powerpoint/2010/main" val="1024086991"/>
-      </p:ext>
-    </p:extLst>
-  </p:cSld>
-  <p:clrMapOvr>
-    <a:masterClrMapping/>
-  </p:clrMapOvr>
-</p:notes>
-</file>
-
-<file path=ppt/notesSlides/notesSlide18.xml><?xml version="1.0" encoding="utf-8"?>
-<p:notes xmlns:a="http://schemas.openxmlformats.org/drawingml/2006/main" xmlns:r="http://schemas.openxmlformats.org/officeDocument/2006/relationships" xmlns:p="http://schemas.openxmlformats.org/presentationml/2006/main">
-  <p:cSld>
-    <p:spTree>
-      <p:nvGrpSpPr>
-        <p:cNvPr id="1" name=""/>
-        <p:cNvGrpSpPr/>
-        <p:nvPr/>
-      </p:nvGrpSpPr>
-      <p:grpSpPr>
-        <a:xfrm>
-          <a:off x="0" y="0"/>
-          <a:ext cx="0" cy="0"/>
-          <a:chOff x="0" y="0"/>
-          <a:chExt cx="0" cy="0"/>
-        </a:xfrm>
-      </p:grpSpPr>
-      <p:sp>
-        <p:nvSpPr>
-          <p:cNvPr id="2" name="Slide Image Placeholder 1"/>
-          <p:cNvSpPr>
-            <a:spLocks noGrp="1" noRot="1" noChangeAspect="1"/>
-          </p:cNvSpPr>
-          <p:nvPr>
-            <p:ph type="sldImg"/>
-          </p:nvPr>
-        </p:nvSpPr>
-        <p:spPr/>
-      </p:sp>
-      <p:sp>
-        <p:nvSpPr>
-          <p:cNvPr id="3" name="Notes Placeholder 2"/>
-          <p:cNvSpPr>
-            <a:spLocks noGrp="1"/>
-          </p:cNvSpPr>
-          <p:nvPr>
-            <p:ph type="body" idx="1"/>
-          </p:nvPr>
-        </p:nvSpPr>
-        <p:spPr/>
-        <p:txBody>
-          <a:bodyPr/>
-          <a:lstStyle/>
-          <a:p>
-            <a:r>
-              <a:rPr lang="en-US" dirty="0"/>
-              <a:t>Transition directe vers le live coding : on enchaîne sans pause. La question 6 du quiz est le pont — gardez-la en tête.</a:t>
-            </a:r>
-            <a:endParaRPr lang="en-US" dirty="0"/>
-          </a:p>
-        </p:txBody>
-      </p:sp>
-      <p:sp>
-        <p:nvSpPr>
-          <p:cNvPr id="4" name="Slide Number Placeholder 3"/>
-          <p:cNvSpPr>
-            <a:spLocks noGrp="1"/>
-          </p:cNvSpPr>
-          <p:nvPr>
-            <p:ph type="sldNum" sz="quarter" idx="10"/>
-          </p:nvPr>
-        </p:nvSpPr>
-        <p:spPr/>
-        <p:txBody>
-          <a:bodyPr/>
-          <a:lstStyle/>
-          <a:p>
-            <a:fld id="{F7021451-1387-4CA6-816F-3879F97B5CBC}" type="slidenum">
-              <a:rPr lang="en-US"/>
-              <a:t>18</a:t>
             </a:fld>
             <a:endParaRPr lang="en-US"/>
           </a:p>
@@ -2715,7 +2359,7 @@
                 <a:ea typeface="Calibri" pitchFamily="34" charset="-122"/>
                 <a:cs typeface="Calibri" pitchFamily="34" charset="-120"/>
               </a:rPr>
-              <a:t>8 questions, 10 minutes. On repart de ce que le test a montré.</a:t>
+              <a:t>6 questions, 7 minutes. On repart de ce que le test a montré.</a:t>
             </a:r>
             <a:endParaRPr lang="en-US" sz="2400" dirty="0"/>
           </a:p>
@@ -3030,7 +2674,7 @@
                 <a:ea typeface="Calibri" pitchFamily="34" charset="-122"/>
                 <a:cs typeface="Calibri" pitchFamily="34" charset="-120"/>
               </a:rPr>
-              <a:t>QUESTION 5 / 8</a:t>
+              <a:t>QUESTION 5 / 6</a:t>
             </a:r>
             <a:endParaRPr lang="en-US" sz="1600" dirty="0"/>
           </a:p>
@@ -3131,7 +2775,7 @@
                 <a:ea typeface="Courier New" pitchFamily="34" charset="-122"/>
                 <a:cs typeface="Courier New" pitchFamily="34" charset="-120"/>
               </a:rPr>
-              <a:t>print("nom")</a:t>
+              <a:t>print("Bonjour" + nom)</a:t>
             </a:r>
             <a:endParaRPr lang="en-US" sz="4200" dirty="0"/>
           </a:p>
@@ -3234,7 +2878,7 @@
                 <a:ea typeface="Calibri" pitchFamily="34" charset="-122"/>
                 <a:cs typeface="Calibri" pitchFamily="34" charset="-120"/>
               </a:rPr>
-              <a:t>nom</a:t>
+              <a:t>Bonjour Joyce</a:t>
             </a:r>
             <a:endParaRPr lang="en-US" sz="2300" dirty="0"/>
           </a:p>
@@ -3337,7 +2981,7 @@
                 <a:ea typeface="Calibri" pitchFamily="34" charset="-122"/>
                 <a:cs typeface="Calibri" pitchFamily="34" charset="-120"/>
               </a:rPr>
-              <a:t>Joyce</a:t>
+              <a:t>Bonjour nom</a:t>
             </a:r>
             <a:endParaRPr lang="en-US" sz="2300" dirty="0"/>
           </a:p>
@@ -3440,7 +3084,7 @@
                 <a:ea typeface="Calibri" pitchFamily="34" charset="-122"/>
                 <a:cs typeface="Calibri" pitchFamily="34" charset="-120"/>
               </a:rPr>
-              <a:t>une erreur</a:t>
+              <a:t>BonjourJoyce</a:t>
             </a:r>
             <a:endParaRPr lang="en-US" sz="2300" dirty="0"/>
           </a:p>
@@ -3543,7 +3187,7 @@
                 <a:ea typeface="Calibri" pitchFamily="34" charset="-122"/>
                 <a:cs typeface="Calibri" pitchFamily="34" charset="-120"/>
               </a:rPr>
-              <a:t>rien</a:t>
+              <a:t>une erreur</a:t>
             </a:r>
             <a:endParaRPr lang="en-US" sz="2300" dirty="0"/>
           </a:p>
@@ -3670,7 +3314,7 @@
                 <a:ea typeface="Courier New" pitchFamily="34" charset="-122"/>
                 <a:cs typeface="Courier New" pitchFamily="34" charset="-120"/>
               </a:rPr>
-              <a:t>print("nom")</a:t>
+              <a:t>print("Bonjour" + nom)</a:t>
             </a:r>
             <a:endParaRPr lang="en-US" sz="2200" dirty="0"/>
           </a:p>
@@ -3693,7 +3337,7 @@
             </a:avLst>
           </a:prstGeom>
           <a:solidFill>
-            <a:srgbClr val="D7262B"/>
+            <a:srgbClr val="E8871E"/>
           </a:solidFill>
           <a:ln/>
         </p:spPr>
@@ -3731,7 +3375,7 @@
                 <a:ea typeface="Calibri" pitchFamily="34" charset="-122"/>
                 <a:cs typeface="Calibri" pitchFamily="34" charset="-120"/>
               </a:rPr>
-              <a:t>▲   ROUGE</a:t>
+              <a:t>●   ORANGE</a:t>
             </a:r>
             <a:endParaRPr lang="en-US" sz="1500" dirty="0"/>
           </a:p>
@@ -3770,7 +3414,7 @@
                 <a:ea typeface="Calibri" pitchFamily="34" charset="-122"/>
                 <a:cs typeface="Calibri" pitchFamily="34" charset="-120"/>
               </a:rPr>
-              <a:t>nom</a:t>
+              <a:t>BonjourJoyce</a:t>
             </a:r>
             <a:endParaRPr lang="en-US" sz="3600" dirty="0"/>
           </a:p>
@@ -3912,7 +3556,7 @@
                 <a:ea typeface="Calibri" pitchFamily="34" charset="-122"/>
                 <a:cs typeface="Calibri" pitchFamily="34" charset="-120"/>
               </a:rPr>
-              <a:t>Avec guillemets : le MOT. Sans guillemets : ce qu'il y a dans la boîte.</a:t>
+              <a:t>Il colle exactement ce qu'on lui donne. L'espace manquait dans "Bonjour ".</a:t>
             </a:r>
             <a:endParaRPr lang="en-US" sz="2000" dirty="0"/>
           </a:p>
@@ -3983,7 +3627,7 @@
                 <a:ea typeface="Calibri" pitchFamily="34" charset="-122"/>
                 <a:cs typeface="Calibri" pitchFamily="34" charset="-120"/>
               </a:rPr>
-              <a:t>QUESTION 6 / 8</a:t>
+              <a:t>QUESTION 6 / 6</a:t>
             </a:r>
             <a:endParaRPr lang="en-US" sz="1600" dirty="0"/>
           </a:p>
@@ -4942,1912 +4586,6 @@
       </p:grpSpPr>
       <p:sp>
         <p:nvSpPr>
-          <p:cNvPr id="2" name="Text 0"/>
-          <p:cNvSpPr txBox="1"/>
-          <p:nvPr/>
-        </p:nvSpPr>
-        <p:spPr>
-          <a:xfrm>
-            <a:off x="548640" y="411480"/>
-            <a:ext cx="5486400" cy="457200"/>
-          </a:xfrm>
-          <a:prstGeom prst="rect">
-            <a:avLst/>
-          </a:prstGeom>
-          <a:noFill/>
-          <a:ln/>
-        </p:spPr>
-        <p:txBody>
-          <a:bodyPr wrap="square" lIns="0" tIns="0" rIns="0" bIns="0" rtlCol="0" anchor="t"/>
-          <a:lstStyle/>
-          <a:p>
-            <a:pPr indent="0" marL="0">
-              <a:buNone/>
-            </a:pPr>
-            <a:r>
-              <a:rPr lang="en-US" sz="1600" b="1" spc="300" kern="0" dirty="0">
-                <a:solidFill>
-                  <a:srgbClr val="B06FD8"/>
-                </a:solidFill>
-                <a:latin typeface="Calibri" pitchFamily="34" charset="0"/>
-                <a:ea typeface="Calibri" pitchFamily="34" charset="-122"/>
-                <a:cs typeface="Calibri" pitchFamily="34" charset="-120"/>
-              </a:rPr>
-              <a:t>QUESTION 7 / 8</a:t>
-            </a:r>
-            <a:endParaRPr lang="en-US" sz="1600" dirty="0"/>
-          </a:p>
-        </p:txBody>
-      </p:sp>
-      <p:sp>
-        <p:nvSpPr>
-          <p:cNvPr id="3" name="Text 1"/>
-          <p:cNvSpPr txBox="1"/>
-          <p:nvPr/>
-        </p:nvSpPr>
-        <p:spPr>
-          <a:xfrm>
-            <a:off x="10332720" y="411480"/>
-            <a:ext cx="1280160" cy="457200"/>
-          </a:xfrm>
-          <a:prstGeom prst="rect">
-            <a:avLst/>
-          </a:prstGeom>
-          <a:noFill/>
-          <a:ln/>
-        </p:spPr>
-        <p:txBody>
-          <a:bodyPr wrap="square" lIns="0" tIns="0" rIns="0" bIns="0" rtlCol="0" anchor="t"/>
-          <a:lstStyle/>
-          <a:p>
-            <a:pPr algn="r" indent="0" marL="0">
-              <a:buNone/>
-            </a:pPr>
-            <a:r>
-              <a:rPr lang="en-US" sz="1600" dirty="0">
-                <a:solidFill>
-                  <a:srgbClr val="A8A8C0"/>
-                </a:solidFill>
-                <a:latin typeface="Calibri" pitchFamily="34" charset="0"/>
-                <a:ea typeface="Calibri" pitchFamily="34" charset="-122"/>
-                <a:cs typeface="Calibri" pitchFamily="34" charset="-120"/>
-              </a:rPr>
-              <a:t>20 s</a:t>
-            </a:r>
-            <a:endParaRPr lang="en-US" sz="1600" dirty="0"/>
-          </a:p>
-        </p:txBody>
-      </p:sp>
-      <p:sp>
-        <p:nvSpPr>
-          <p:cNvPr id="4" name="Text 2"/>
-          <p:cNvSpPr txBox="1"/>
-          <p:nvPr/>
-        </p:nvSpPr>
-        <p:spPr>
-          <a:xfrm>
-            <a:off x="548640" y="1051560"/>
-            <a:ext cx="11064240" cy="1691640"/>
-          </a:xfrm>
-          <a:prstGeom prst="rect">
-            <a:avLst/>
-          </a:prstGeom>
-          <a:noFill/>
-          <a:ln/>
-        </p:spPr>
-        <p:txBody>
-          <a:bodyPr wrap="square" lIns="0" tIns="0" rIns="0" bIns="0" rtlCol="0" anchor="ctr"/>
-          <a:lstStyle/>
-          <a:p>
-            <a:pPr algn="ctr" indent="0" marL="0">
-              <a:lnSpc>
-                <a:spcPts val="4800"/>
-              </a:lnSpc>
-              <a:buNone/>
-            </a:pPr>
-            <a:r>
-              <a:rPr lang="en-US" sz="4200" b="1" dirty="0">
-                <a:solidFill>
-                  <a:srgbClr val="FFFFFF"/>
-                </a:solidFill>
-                <a:latin typeface="Courier New" pitchFamily="34" charset="0"/>
-                <a:ea typeface="Courier New" pitchFamily="34" charset="-122"/>
-                <a:cs typeface="Courier New" pitchFamily="34" charset="-120"/>
-              </a:rPr>
-              <a:t>nom = "Joyce"</a:t>
-            </a:r>
-            <a:endParaRPr lang="en-US" sz="4200" dirty="0"/>
-          </a:p>
-          <a:p>
-            <a:pPr algn="ctr" indent="0" marL="0">
-              <a:lnSpc>
-                <a:spcPts val="4800"/>
-              </a:lnSpc>
-              <a:buNone/>
-            </a:pPr>
-            <a:r>
-              <a:rPr lang="en-US" sz="4200" b="1" dirty="0">
-                <a:solidFill>
-                  <a:srgbClr val="FFFFFF"/>
-                </a:solidFill>
-                <a:latin typeface="Courier New" pitchFamily="34" charset="0"/>
-                <a:ea typeface="Courier New" pitchFamily="34" charset="-122"/>
-                <a:cs typeface="Courier New" pitchFamily="34" charset="-120"/>
-              </a:rPr>
-              <a:t>print("Bonjour" + nom)</a:t>
-            </a:r>
-            <a:endParaRPr lang="en-US" sz="4200" dirty="0"/>
-          </a:p>
-        </p:txBody>
-      </p:sp>
-      <p:sp>
-        <p:nvSpPr>
-          <p:cNvPr id="5" name="Shape 3"/>
-          <p:cNvSpPr/>
-          <p:nvPr/>
-        </p:nvSpPr>
-        <p:spPr>
-          <a:xfrm>
-            <a:off x="548640" y="3063240"/>
-            <a:ext cx="5440680" cy="1463040"/>
-          </a:xfrm>
-          <a:prstGeom prst="roundRect">
-            <a:avLst>
-              <a:gd name="adj" fmla="val 5000"/>
-            </a:avLst>
-          </a:prstGeom>
-          <a:solidFill>
-            <a:srgbClr val="D7262B"/>
-          </a:solidFill>
-          <a:ln/>
-        </p:spPr>
-      </p:sp>
-      <p:sp>
-        <p:nvSpPr>
-          <p:cNvPr id="6" name="Text 4"/>
-          <p:cNvSpPr txBox="1"/>
-          <p:nvPr/>
-        </p:nvSpPr>
-        <p:spPr>
-          <a:xfrm>
-            <a:off x="777240" y="3474720"/>
-            <a:ext cx="640080" cy="640080"/>
-          </a:xfrm>
-          <a:prstGeom prst="rect">
-            <a:avLst/>
-          </a:prstGeom>
-          <a:noFill/>
-          <a:ln/>
-        </p:spPr>
-        <p:txBody>
-          <a:bodyPr wrap="square" lIns="0" tIns="0" rIns="0" bIns="0" rtlCol="0" anchor="t"/>
-          <a:lstStyle/>
-          <a:p>
-            <a:pPr algn="ctr" indent="0" marL="0">
-              <a:buNone/>
-            </a:pPr>
-            <a:r>
-              <a:rPr lang="en-US" sz="2400" dirty="0">
-                <a:solidFill>
-                  <a:srgbClr val="FFFFFF"/>
-                </a:solidFill>
-                <a:latin typeface="Calibri" pitchFamily="34" charset="0"/>
-                <a:ea typeface="Calibri" pitchFamily="34" charset="-122"/>
-                <a:cs typeface="Calibri" pitchFamily="34" charset="-120"/>
-              </a:rPr>
-              <a:t>▲</a:t>
-            </a:r>
-            <a:endParaRPr lang="en-US" sz="2400" dirty="0"/>
-          </a:p>
-        </p:txBody>
-      </p:sp>
-      <p:sp>
-        <p:nvSpPr>
-          <p:cNvPr id="7" name="Text 5"/>
-          <p:cNvSpPr txBox="1"/>
-          <p:nvPr/>
-        </p:nvSpPr>
-        <p:spPr>
-          <a:xfrm>
-            <a:off x="1508760" y="3246120"/>
-            <a:ext cx="4297680" cy="1097280"/>
-          </a:xfrm>
-          <a:prstGeom prst="rect">
-            <a:avLst/>
-          </a:prstGeom>
-          <a:noFill/>
-          <a:ln/>
-        </p:spPr>
-        <p:txBody>
-          <a:bodyPr wrap="square" lIns="0" tIns="0" rIns="0" bIns="0" rtlCol="0" anchor="ctr"/>
-          <a:lstStyle/>
-          <a:p>
-            <a:pPr indent="0" marL="0">
-              <a:lnSpc>
-                <a:spcPts val="2600"/>
-              </a:lnSpc>
-              <a:buNone/>
-            </a:pPr>
-            <a:r>
-              <a:rPr lang="en-US" sz="2300" b="1" dirty="0">
-                <a:solidFill>
-                  <a:srgbClr val="FFFFFF"/>
-                </a:solidFill>
-                <a:latin typeface="Calibri" pitchFamily="34" charset="0"/>
-                <a:ea typeface="Calibri" pitchFamily="34" charset="-122"/>
-                <a:cs typeface="Calibri" pitchFamily="34" charset="-120"/>
-              </a:rPr>
-              <a:t>Bonjour Joyce</a:t>
-            </a:r>
-            <a:endParaRPr lang="en-US" sz="2300" dirty="0"/>
-          </a:p>
-        </p:txBody>
-      </p:sp>
-      <p:sp>
-        <p:nvSpPr>
-          <p:cNvPr id="8" name="Shape 6"/>
-          <p:cNvSpPr/>
-          <p:nvPr/>
-        </p:nvSpPr>
-        <p:spPr>
-          <a:xfrm>
-            <a:off x="6172200" y="3063240"/>
-            <a:ext cx="5440680" cy="1463040"/>
-          </a:xfrm>
-          <a:prstGeom prst="roundRect">
-            <a:avLst>
-              <a:gd name="adj" fmla="val 5000"/>
-            </a:avLst>
-          </a:prstGeom>
-          <a:solidFill>
-            <a:srgbClr val="1F6FD0"/>
-          </a:solidFill>
-          <a:ln/>
-        </p:spPr>
-      </p:sp>
-      <p:sp>
-        <p:nvSpPr>
-          <p:cNvPr id="9" name="Text 7"/>
-          <p:cNvSpPr txBox="1"/>
-          <p:nvPr/>
-        </p:nvSpPr>
-        <p:spPr>
-          <a:xfrm>
-            <a:off x="6400800" y="3474720"/>
-            <a:ext cx="640080" cy="640080"/>
-          </a:xfrm>
-          <a:prstGeom prst="rect">
-            <a:avLst/>
-          </a:prstGeom>
-          <a:noFill/>
-          <a:ln/>
-        </p:spPr>
-        <p:txBody>
-          <a:bodyPr wrap="square" lIns="0" tIns="0" rIns="0" bIns="0" rtlCol="0" anchor="t"/>
-          <a:lstStyle/>
-          <a:p>
-            <a:pPr algn="ctr" indent="0" marL="0">
-              <a:buNone/>
-            </a:pPr>
-            <a:r>
-              <a:rPr lang="en-US" sz="2400" dirty="0">
-                <a:solidFill>
-                  <a:srgbClr val="FFFFFF"/>
-                </a:solidFill>
-                <a:latin typeface="Calibri" pitchFamily="34" charset="0"/>
-                <a:ea typeface="Calibri" pitchFamily="34" charset="-122"/>
-                <a:cs typeface="Calibri" pitchFamily="34" charset="-120"/>
-              </a:rPr>
-              <a:t>◆</a:t>
-            </a:r>
-            <a:endParaRPr lang="en-US" sz="2400" dirty="0"/>
-          </a:p>
-        </p:txBody>
-      </p:sp>
-      <p:sp>
-        <p:nvSpPr>
-          <p:cNvPr id="10" name="Text 8"/>
-          <p:cNvSpPr txBox="1"/>
-          <p:nvPr/>
-        </p:nvSpPr>
-        <p:spPr>
-          <a:xfrm>
-            <a:off x="7132320" y="3246120"/>
-            <a:ext cx="4297680" cy="1097280"/>
-          </a:xfrm>
-          <a:prstGeom prst="rect">
-            <a:avLst/>
-          </a:prstGeom>
-          <a:noFill/>
-          <a:ln/>
-        </p:spPr>
-        <p:txBody>
-          <a:bodyPr wrap="square" lIns="0" tIns="0" rIns="0" bIns="0" rtlCol="0" anchor="ctr"/>
-          <a:lstStyle/>
-          <a:p>
-            <a:pPr indent="0" marL="0">
-              <a:lnSpc>
-                <a:spcPts val="2600"/>
-              </a:lnSpc>
-              <a:buNone/>
-            </a:pPr>
-            <a:r>
-              <a:rPr lang="en-US" sz="2300" b="1" dirty="0">
-                <a:solidFill>
-                  <a:srgbClr val="FFFFFF"/>
-                </a:solidFill>
-                <a:latin typeface="Calibri" pitchFamily="34" charset="0"/>
-                <a:ea typeface="Calibri" pitchFamily="34" charset="-122"/>
-                <a:cs typeface="Calibri" pitchFamily="34" charset="-120"/>
-              </a:rPr>
-              <a:t>Bonjour nom</a:t>
-            </a:r>
-            <a:endParaRPr lang="en-US" sz="2300" dirty="0"/>
-          </a:p>
-        </p:txBody>
-      </p:sp>
-      <p:sp>
-        <p:nvSpPr>
-          <p:cNvPr id="11" name="Shape 9"/>
-          <p:cNvSpPr/>
-          <p:nvPr/>
-        </p:nvSpPr>
-        <p:spPr>
-          <a:xfrm>
-            <a:off x="548640" y="4754880"/>
-            <a:ext cx="5440680" cy="1463040"/>
-          </a:xfrm>
-          <a:prstGeom prst="roundRect">
-            <a:avLst>
-              <a:gd name="adj" fmla="val 5000"/>
-            </a:avLst>
-          </a:prstGeom>
-          <a:solidFill>
-            <a:srgbClr val="E8871E"/>
-          </a:solidFill>
-          <a:ln/>
-        </p:spPr>
-      </p:sp>
-      <p:sp>
-        <p:nvSpPr>
-          <p:cNvPr id="12" name="Text 10"/>
-          <p:cNvSpPr txBox="1"/>
-          <p:nvPr/>
-        </p:nvSpPr>
-        <p:spPr>
-          <a:xfrm>
-            <a:off x="777240" y="5166360"/>
-            <a:ext cx="640080" cy="640080"/>
-          </a:xfrm>
-          <a:prstGeom prst="rect">
-            <a:avLst/>
-          </a:prstGeom>
-          <a:noFill/>
-          <a:ln/>
-        </p:spPr>
-        <p:txBody>
-          <a:bodyPr wrap="square" lIns="0" tIns="0" rIns="0" bIns="0" rtlCol="0" anchor="t"/>
-          <a:lstStyle/>
-          <a:p>
-            <a:pPr algn="ctr" indent="0" marL="0">
-              <a:buNone/>
-            </a:pPr>
-            <a:r>
-              <a:rPr lang="en-US" sz="2400" dirty="0">
-                <a:solidFill>
-                  <a:srgbClr val="FFFFFF"/>
-                </a:solidFill>
-                <a:latin typeface="Calibri" pitchFamily="34" charset="0"/>
-                <a:ea typeface="Calibri" pitchFamily="34" charset="-122"/>
-                <a:cs typeface="Calibri" pitchFamily="34" charset="-120"/>
-              </a:rPr>
-              <a:t>●</a:t>
-            </a:r>
-            <a:endParaRPr lang="en-US" sz="2400" dirty="0"/>
-          </a:p>
-        </p:txBody>
-      </p:sp>
-      <p:sp>
-        <p:nvSpPr>
-          <p:cNvPr id="13" name="Text 11"/>
-          <p:cNvSpPr txBox="1"/>
-          <p:nvPr/>
-        </p:nvSpPr>
-        <p:spPr>
-          <a:xfrm>
-            <a:off x="1508760" y="4937760"/>
-            <a:ext cx="4297680" cy="1097280"/>
-          </a:xfrm>
-          <a:prstGeom prst="rect">
-            <a:avLst/>
-          </a:prstGeom>
-          <a:noFill/>
-          <a:ln/>
-        </p:spPr>
-        <p:txBody>
-          <a:bodyPr wrap="square" lIns="0" tIns="0" rIns="0" bIns="0" rtlCol="0" anchor="ctr"/>
-          <a:lstStyle/>
-          <a:p>
-            <a:pPr indent="0" marL="0">
-              <a:lnSpc>
-                <a:spcPts val="2600"/>
-              </a:lnSpc>
-              <a:buNone/>
-            </a:pPr>
-            <a:r>
-              <a:rPr lang="en-US" sz="2300" b="1" dirty="0">
-                <a:solidFill>
-                  <a:srgbClr val="FFFFFF"/>
-                </a:solidFill>
-                <a:latin typeface="Calibri" pitchFamily="34" charset="0"/>
-                <a:ea typeface="Calibri" pitchFamily="34" charset="-122"/>
-                <a:cs typeface="Calibri" pitchFamily="34" charset="-120"/>
-              </a:rPr>
-              <a:t>BonjourJoyce</a:t>
-            </a:r>
-            <a:endParaRPr lang="en-US" sz="2300" dirty="0"/>
-          </a:p>
-        </p:txBody>
-      </p:sp>
-      <p:sp>
-        <p:nvSpPr>
-          <p:cNvPr id="14" name="Shape 12"/>
-          <p:cNvSpPr/>
-          <p:nvPr/>
-        </p:nvSpPr>
-        <p:spPr>
-          <a:xfrm>
-            <a:off x="6172200" y="4754880"/>
-            <a:ext cx="5440680" cy="1463040"/>
-          </a:xfrm>
-          <a:prstGeom prst="roundRect">
-            <a:avLst>
-              <a:gd name="adj" fmla="val 5000"/>
-            </a:avLst>
-          </a:prstGeom>
-          <a:solidFill>
-            <a:srgbClr val="1E9E4A"/>
-          </a:solidFill>
-          <a:ln/>
-        </p:spPr>
-      </p:sp>
-      <p:sp>
-        <p:nvSpPr>
-          <p:cNvPr id="15" name="Text 13"/>
-          <p:cNvSpPr txBox="1"/>
-          <p:nvPr/>
-        </p:nvSpPr>
-        <p:spPr>
-          <a:xfrm>
-            <a:off x="6400800" y="5166360"/>
-            <a:ext cx="640080" cy="640080"/>
-          </a:xfrm>
-          <a:prstGeom prst="rect">
-            <a:avLst/>
-          </a:prstGeom>
-          <a:noFill/>
-          <a:ln/>
-        </p:spPr>
-        <p:txBody>
-          <a:bodyPr wrap="square" lIns="0" tIns="0" rIns="0" bIns="0" rtlCol="0" anchor="t"/>
-          <a:lstStyle/>
-          <a:p>
-            <a:pPr algn="ctr" indent="0" marL="0">
-              <a:buNone/>
-            </a:pPr>
-            <a:r>
-              <a:rPr lang="en-US" sz="2400" dirty="0">
-                <a:solidFill>
-                  <a:srgbClr val="FFFFFF"/>
-                </a:solidFill>
-                <a:latin typeface="Calibri" pitchFamily="34" charset="0"/>
-                <a:ea typeface="Calibri" pitchFamily="34" charset="-122"/>
-                <a:cs typeface="Calibri" pitchFamily="34" charset="-120"/>
-              </a:rPr>
-              <a:t>■</a:t>
-            </a:r>
-            <a:endParaRPr lang="en-US" sz="2400" dirty="0"/>
-          </a:p>
-        </p:txBody>
-      </p:sp>
-      <p:sp>
-        <p:nvSpPr>
-          <p:cNvPr id="16" name="Text 14"/>
-          <p:cNvSpPr txBox="1"/>
-          <p:nvPr/>
-        </p:nvSpPr>
-        <p:spPr>
-          <a:xfrm>
-            <a:off x="7132320" y="4937760"/>
-            <a:ext cx="4297680" cy="1097280"/>
-          </a:xfrm>
-          <a:prstGeom prst="rect">
-            <a:avLst/>
-          </a:prstGeom>
-          <a:noFill/>
-          <a:ln/>
-        </p:spPr>
-        <p:txBody>
-          <a:bodyPr wrap="square" lIns="0" tIns="0" rIns="0" bIns="0" rtlCol="0" anchor="ctr"/>
-          <a:lstStyle/>
-          <a:p>
-            <a:pPr indent="0" marL="0">
-              <a:lnSpc>
-                <a:spcPts val="2600"/>
-              </a:lnSpc>
-              <a:buNone/>
-            </a:pPr>
-            <a:r>
-              <a:rPr lang="en-US" sz="2300" b="1" dirty="0">
-                <a:solidFill>
-                  <a:srgbClr val="FFFFFF"/>
-                </a:solidFill>
-                <a:latin typeface="Calibri" pitchFamily="34" charset="0"/>
-                <a:ea typeface="Calibri" pitchFamily="34" charset="-122"/>
-                <a:cs typeface="Calibri" pitchFamily="34" charset="-120"/>
-              </a:rPr>
-              <a:t>une erreur</a:t>
-            </a:r>
-            <a:endParaRPr lang="en-US" sz="2300" dirty="0"/>
-          </a:p>
-        </p:txBody>
-      </p:sp>
-    </p:spTree>
-  </p:cSld>
-  <p:clrMapOvr>
-    <a:masterClrMapping/>
-  </p:clrMapOvr>
-</p:sld>
-</file>
-
-<file path=ppt/slides/slide15.xml><?xml version="1.0" encoding="utf-8"?>
-<p:sld xmlns:a="http://schemas.openxmlformats.org/drawingml/2006/main" xmlns:r="http://schemas.openxmlformats.org/officeDocument/2006/relationships" xmlns:p="http://schemas.openxmlformats.org/presentationml/2006/main">
-  <p:cSld name="Slide 15">
-    <p:bg>
-      <p:bgPr>
-        <a:solidFill>
-          <a:srgbClr val="12122A"/>
-        </a:solidFill>
-      </p:bgPr>
-    </p:bg>
-    <p:spTree>
-      <p:nvGrpSpPr>
-        <p:cNvPr id="1" name=""/>
-        <p:cNvGrpSpPr/>
-        <p:nvPr/>
-      </p:nvGrpSpPr>
-      <p:grpSpPr>
-        <a:xfrm>
-          <a:off x="0" y="0"/>
-          <a:ext cx="0" cy="0"/>
-          <a:chOff x="0" y="0"/>
-          <a:chExt cx="0" cy="0"/>
-        </a:xfrm>
-      </p:grpSpPr>
-      <p:sp>
-        <p:nvSpPr>
-          <p:cNvPr id="2" name="Text 0"/>
-          <p:cNvSpPr txBox="1"/>
-          <p:nvPr/>
-        </p:nvSpPr>
-        <p:spPr>
-          <a:xfrm>
-            <a:off x="548640" y="411480"/>
-            <a:ext cx="5486400" cy="457200"/>
-          </a:xfrm>
-          <a:prstGeom prst="rect">
-            <a:avLst/>
-          </a:prstGeom>
-          <a:noFill/>
-          <a:ln/>
-        </p:spPr>
-        <p:txBody>
-          <a:bodyPr wrap="square" lIns="0" tIns="0" rIns="0" bIns="0" rtlCol="0" anchor="t"/>
-          <a:lstStyle/>
-          <a:p>
-            <a:pPr indent="0" marL="0">
-              <a:buNone/>
-            </a:pPr>
-            <a:r>
-              <a:rPr lang="en-US" sz="1600" b="1" spc="300" kern="0" dirty="0">
-                <a:solidFill>
-                  <a:srgbClr val="2FB765"/>
-                </a:solidFill>
-                <a:latin typeface="Calibri" pitchFamily="34" charset="0"/>
-                <a:ea typeface="Calibri" pitchFamily="34" charset="-122"/>
-                <a:cs typeface="Calibri" pitchFamily="34" charset="-120"/>
-              </a:rPr>
-              <a:t>RÉPONSE 7</a:t>
-            </a:r>
-            <a:endParaRPr lang="en-US" sz="1600" dirty="0"/>
-          </a:p>
-        </p:txBody>
-      </p:sp>
-      <p:sp>
-        <p:nvSpPr>
-          <p:cNvPr id="3" name="Text 1"/>
-          <p:cNvSpPr txBox="1"/>
-          <p:nvPr/>
-        </p:nvSpPr>
-        <p:spPr>
-          <a:xfrm>
-            <a:off x="548640" y="960120"/>
-            <a:ext cx="11064240" cy="914400"/>
-          </a:xfrm>
-          <a:prstGeom prst="rect">
-            <a:avLst/>
-          </a:prstGeom>
-          <a:noFill/>
-          <a:ln/>
-        </p:spPr>
-        <p:txBody>
-          <a:bodyPr wrap="square" lIns="0" tIns="0" rIns="0" bIns="0" rtlCol="0" anchor="t"/>
-          <a:lstStyle/>
-          <a:p>
-            <a:pPr algn="ctr" indent="0" marL="0">
-              <a:buNone/>
-            </a:pPr>
-            <a:r>
-              <a:rPr lang="en-US" sz="2200" dirty="0">
-                <a:solidFill>
-                  <a:srgbClr val="A8A8C0"/>
-                </a:solidFill>
-                <a:latin typeface="Courier New" pitchFamily="34" charset="0"/>
-                <a:ea typeface="Courier New" pitchFamily="34" charset="-122"/>
-                <a:cs typeface="Courier New" pitchFamily="34" charset="-120"/>
-              </a:rPr>
-              <a:t>nom = "Joyce"</a:t>
-            </a:r>
-            <a:endParaRPr lang="en-US" sz="2200" dirty="0"/>
-          </a:p>
-          <a:p>
-            <a:pPr algn="ctr" indent="0" marL="0">
-              <a:buNone/>
-            </a:pPr>
-            <a:r>
-              <a:rPr lang="en-US" sz="2200" dirty="0">
-                <a:solidFill>
-                  <a:srgbClr val="A8A8C0"/>
-                </a:solidFill>
-                <a:latin typeface="Courier New" pitchFamily="34" charset="0"/>
-                <a:ea typeface="Courier New" pitchFamily="34" charset="-122"/>
-                <a:cs typeface="Courier New" pitchFamily="34" charset="-120"/>
-              </a:rPr>
-              <a:t>print("Bonjour" + nom)</a:t>
-            </a:r>
-            <a:endParaRPr lang="en-US" sz="2200" dirty="0"/>
-          </a:p>
-        </p:txBody>
-      </p:sp>
-      <p:sp>
-        <p:nvSpPr>
-          <p:cNvPr id="4" name="Shape 2"/>
-          <p:cNvSpPr/>
-          <p:nvPr/>
-        </p:nvSpPr>
-        <p:spPr>
-          <a:xfrm>
-            <a:off x="1463040" y="2103120"/>
-            <a:ext cx="9235440" cy="1691640"/>
-          </a:xfrm>
-          <a:prstGeom prst="roundRect">
-            <a:avLst>
-              <a:gd name="adj" fmla="val 5405"/>
-            </a:avLst>
-          </a:prstGeom>
-          <a:solidFill>
-            <a:srgbClr val="E8871E"/>
-          </a:solidFill>
-          <a:ln/>
-        </p:spPr>
-      </p:sp>
-      <p:sp>
-        <p:nvSpPr>
-          <p:cNvPr id="5" name="Text 3"/>
-          <p:cNvSpPr txBox="1"/>
-          <p:nvPr/>
-        </p:nvSpPr>
-        <p:spPr>
-          <a:xfrm>
-            <a:off x="1828800" y="2331720"/>
-            <a:ext cx="3657600" cy="457200"/>
-          </a:xfrm>
-          <a:prstGeom prst="rect">
-            <a:avLst/>
-          </a:prstGeom>
-          <a:noFill/>
-          <a:ln/>
-        </p:spPr>
-        <p:txBody>
-          <a:bodyPr wrap="square" lIns="0" tIns="0" rIns="0" bIns="0" rtlCol="0" anchor="t"/>
-          <a:lstStyle/>
-          <a:p>
-            <a:pPr indent="0" marL="0">
-              <a:buNone/>
-            </a:pPr>
-            <a:r>
-              <a:rPr lang="en-US" sz="1500" b="1" spc="200" kern="0" dirty="0">
-                <a:solidFill>
-                  <a:srgbClr val="FFFFFF"/>
-                </a:solidFill>
-                <a:latin typeface="Calibri" pitchFamily="34" charset="0"/>
-                <a:ea typeface="Calibri" pitchFamily="34" charset="-122"/>
-                <a:cs typeface="Calibri" pitchFamily="34" charset="-120"/>
-              </a:rPr>
-              <a:t>●   ORANGE</a:t>
-            </a:r>
-            <a:endParaRPr lang="en-US" sz="1500" dirty="0"/>
-          </a:p>
-        </p:txBody>
-      </p:sp>
-      <p:sp>
-        <p:nvSpPr>
-          <p:cNvPr id="6" name="Text 4"/>
-          <p:cNvSpPr txBox="1"/>
-          <p:nvPr/>
-        </p:nvSpPr>
-        <p:spPr>
-          <a:xfrm>
-            <a:off x="1828800" y="2743200"/>
-            <a:ext cx="8503920" cy="914400"/>
-          </a:xfrm>
-          <a:prstGeom prst="rect">
-            <a:avLst/>
-          </a:prstGeom>
-          <a:noFill/>
-          <a:ln/>
-        </p:spPr>
-        <p:txBody>
-          <a:bodyPr wrap="square" lIns="0" tIns="0" rIns="0" bIns="0" rtlCol="0" anchor="ctr"/>
-          <a:lstStyle/>
-          <a:p>
-            <a:pPr indent="0" marL="0">
-              <a:buNone/>
-            </a:pPr>
-            <a:r>
-              <a:rPr lang="en-US" sz="3600" b="1" dirty="0">
-                <a:solidFill>
-                  <a:srgbClr val="FFFFFF"/>
-                </a:solidFill>
-                <a:latin typeface="Calibri" pitchFamily="34" charset="0"/>
-                <a:ea typeface="Calibri" pitchFamily="34" charset="-122"/>
-                <a:cs typeface="Calibri" pitchFamily="34" charset="-120"/>
-              </a:rPr>
-              <a:t>BonjourJoyce</a:t>
-            </a:r>
-            <a:endParaRPr lang="en-US" sz="3600" dirty="0"/>
-          </a:p>
-        </p:txBody>
-      </p:sp>
-      <p:sp>
-        <p:nvSpPr>
-          <p:cNvPr id="7" name="Text 5"/>
-          <p:cNvSpPr txBox="1"/>
-          <p:nvPr/>
-        </p:nvSpPr>
-        <p:spPr>
-          <a:xfrm>
-            <a:off x="9509760" y="2377440"/>
-            <a:ext cx="1005840" cy="1097280"/>
-          </a:xfrm>
-          <a:prstGeom prst="rect">
-            <a:avLst/>
-          </a:prstGeom>
-          <a:noFill/>
-          <a:ln/>
-        </p:spPr>
-        <p:txBody>
-          <a:bodyPr wrap="square" lIns="0" tIns="0" rIns="0" bIns="0" rtlCol="0" anchor="t"/>
-          <a:lstStyle/>
-          <a:p>
-            <a:pPr algn="ctr" indent="0" marL="0">
-              <a:buNone/>
-            </a:pPr>
-            <a:r>
-              <a:rPr lang="en-US" sz="4600" dirty="0">
-                <a:solidFill>
-                  <a:srgbClr val="FFFFFF"/>
-                </a:solidFill>
-                <a:latin typeface="Calibri" pitchFamily="34" charset="0"/>
-                <a:ea typeface="Calibri" pitchFamily="34" charset="-122"/>
-                <a:cs typeface="Calibri" pitchFamily="34" charset="-120"/>
-              </a:rPr>
-              <a:t>✔</a:t>
-            </a:r>
-            <a:endParaRPr lang="en-US" sz="4600" dirty="0"/>
-          </a:p>
-        </p:txBody>
-      </p:sp>
-      <p:sp>
-        <p:nvSpPr>
-          <p:cNvPr id="8" name="Shape 6"/>
-          <p:cNvSpPr/>
-          <p:nvPr/>
-        </p:nvSpPr>
-        <p:spPr>
-          <a:xfrm>
-            <a:off x="1463040" y="4114800"/>
-            <a:ext cx="9235440" cy="1737360"/>
-          </a:xfrm>
-          <a:prstGeom prst="roundRect">
-            <a:avLst>
-              <a:gd name="adj" fmla="val 4211"/>
-            </a:avLst>
-          </a:prstGeom>
-          <a:solidFill>
-            <a:srgbClr val="20204A"/>
-          </a:solidFill>
-          <a:ln/>
-        </p:spPr>
-      </p:sp>
-      <p:sp>
-        <p:nvSpPr>
-          <p:cNvPr id="9" name="Text 7"/>
-          <p:cNvSpPr txBox="1"/>
-          <p:nvPr/>
-        </p:nvSpPr>
-        <p:spPr>
-          <a:xfrm>
-            <a:off x="1828800" y="4343400"/>
-            <a:ext cx="5486400" cy="365760"/>
-          </a:xfrm>
-          <a:prstGeom prst="rect">
-            <a:avLst/>
-          </a:prstGeom>
-          <a:noFill/>
-          <a:ln/>
-        </p:spPr>
-        <p:txBody>
-          <a:bodyPr wrap="square" lIns="0" tIns="0" rIns="0" bIns="0" rtlCol="0" anchor="t"/>
-          <a:lstStyle/>
-          <a:p>
-            <a:pPr indent="0" marL="0">
-              <a:buNone/>
-            </a:pPr>
-            <a:r>
-              <a:rPr lang="en-US" sz="1300" b="1" spc="300" kern="0" dirty="0">
-                <a:solidFill>
-                  <a:srgbClr val="4FC3F7"/>
-                </a:solidFill>
-                <a:latin typeface="Calibri" pitchFamily="34" charset="0"/>
-                <a:ea typeface="Calibri" pitchFamily="34" charset="-122"/>
-                <a:cs typeface="Calibri" pitchFamily="34" charset="-120"/>
-              </a:rPr>
-              <a:t>POURQUOI</a:t>
-            </a:r>
-            <a:endParaRPr lang="en-US" sz="1300" dirty="0"/>
-          </a:p>
-        </p:txBody>
-      </p:sp>
-      <p:sp>
-        <p:nvSpPr>
-          <p:cNvPr id="10" name="Text 8"/>
-          <p:cNvSpPr txBox="1"/>
-          <p:nvPr/>
-        </p:nvSpPr>
-        <p:spPr>
-          <a:xfrm>
-            <a:off x="1828800" y="4754880"/>
-            <a:ext cx="8503920" cy="914400"/>
-          </a:xfrm>
-          <a:prstGeom prst="rect">
-            <a:avLst/>
-          </a:prstGeom>
-          <a:noFill/>
-          <a:ln/>
-        </p:spPr>
-        <p:txBody>
-          <a:bodyPr wrap="square" lIns="0" tIns="0" rIns="0" bIns="0" rtlCol="0" anchor="t"/>
-          <a:lstStyle/>
-          <a:p>
-            <a:pPr indent="0" marL="0">
-              <a:lnSpc>
-                <a:spcPts val="2600"/>
-              </a:lnSpc>
-              <a:buNone/>
-            </a:pPr>
-            <a:r>
-              <a:rPr lang="en-US" sz="2000" dirty="0">
-                <a:solidFill>
-                  <a:srgbClr val="FFFFFF"/>
-                </a:solidFill>
-                <a:latin typeface="Calibri" pitchFamily="34" charset="0"/>
-                <a:ea typeface="Calibri" pitchFamily="34" charset="-122"/>
-                <a:cs typeface="Calibri" pitchFamily="34" charset="-120"/>
-              </a:rPr>
-              <a:t>Il colle exactement ce qu'on lui donne. L'espace manquait dans "Bonjour ".</a:t>
-            </a:r>
-            <a:endParaRPr lang="en-US" sz="2000" dirty="0"/>
-          </a:p>
-        </p:txBody>
-      </p:sp>
-    </p:spTree>
-  </p:cSld>
-  <p:clrMapOvr>
-    <a:masterClrMapping/>
-  </p:clrMapOvr>
-</p:sld>
-</file>
-
-<file path=ppt/slides/slide16.xml><?xml version="1.0" encoding="utf-8"?>
-<p:sld xmlns:a="http://schemas.openxmlformats.org/drawingml/2006/main" xmlns:r="http://schemas.openxmlformats.org/officeDocument/2006/relationships" xmlns:p="http://schemas.openxmlformats.org/presentationml/2006/main">
-  <p:cSld name="Slide 16">
-    <p:bg>
-      <p:bgPr>
-        <a:solidFill>
-          <a:srgbClr val="12122A"/>
-        </a:solidFill>
-      </p:bgPr>
-    </p:bg>
-    <p:spTree>
-      <p:nvGrpSpPr>
-        <p:cNvPr id="1" name=""/>
-        <p:cNvGrpSpPr/>
-        <p:nvPr/>
-      </p:nvGrpSpPr>
-      <p:grpSpPr>
-        <a:xfrm>
-          <a:off x="0" y="0"/>
-          <a:ext cx="0" cy="0"/>
-          <a:chOff x="0" y="0"/>
-          <a:chExt cx="0" cy="0"/>
-        </a:xfrm>
-      </p:grpSpPr>
-      <p:sp>
-        <p:nvSpPr>
-          <p:cNvPr id="2" name="Text 0"/>
-          <p:cNvSpPr txBox="1"/>
-          <p:nvPr/>
-        </p:nvSpPr>
-        <p:spPr>
-          <a:xfrm>
-            <a:off x="548640" y="411480"/>
-            <a:ext cx="5486400" cy="457200"/>
-          </a:xfrm>
-          <a:prstGeom prst="rect">
-            <a:avLst/>
-          </a:prstGeom>
-          <a:noFill/>
-          <a:ln/>
-        </p:spPr>
-        <p:txBody>
-          <a:bodyPr wrap="square" lIns="0" tIns="0" rIns="0" bIns="0" rtlCol="0" anchor="t"/>
-          <a:lstStyle/>
-          <a:p>
-            <a:pPr indent="0" marL="0">
-              <a:buNone/>
-            </a:pPr>
-            <a:r>
-              <a:rPr lang="en-US" sz="1600" b="1" spc="300" kern="0" dirty="0">
-                <a:solidFill>
-                  <a:srgbClr val="B06FD8"/>
-                </a:solidFill>
-                <a:latin typeface="Calibri" pitchFamily="34" charset="0"/>
-                <a:ea typeface="Calibri" pitchFamily="34" charset="-122"/>
-                <a:cs typeface="Calibri" pitchFamily="34" charset="-120"/>
-              </a:rPr>
-              <a:t>QUESTION 8 / 8</a:t>
-            </a:r>
-            <a:endParaRPr lang="en-US" sz="1600" dirty="0"/>
-          </a:p>
-        </p:txBody>
-      </p:sp>
-      <p:sp>
-        <p:nvSpPr>
-          <p:cNvPr id="3" name="Text 1"/>
-          <p:cNvSpPr txBox="1"/>
-          <p:nvPr/>
-        </p:nvSpPr>
-        <p:spPr>
-          <a:xfrm>
-            <a:off x="10332720" y="411480"/>
-            <a:ext cx="1280160" cy="457200"/>
-          </a:xfrm>
-          <a:prstGeom prst="rect">
-            <a:avLst/>
-          </a:prstGeom>
-          <a:noFill/>
-          <a:ln/>
-        </p:spPr>
-        <p:txBody>
-          <a:bodyPr wrap="square" lIns="0" tIns="0" rIns="0" bIns="0" rtlCol="0" anchor="t"/>
-          <a:lstStyle/>
-          <a:p>
-            <a:pPr algn="r" indent="0" marL="0">
-              <a:buNone/>
-            </a:pPr>
-            <a:r>
-              <a:rPr lang="en-US" sz="1600" dirty="0">
-                <a:solidFill>
-                  <a:srgbClr val="A8A8C0"/>
-                </a:solidFill>
-                <a:latin typeface="Calibri" pitchFamily="34" charset="0"/>
-                <a:ea typeface="Calibri" pitchFamily="34" charset="-122"/>
-                <a:cs typeface="Calibri" pitchFamily="34" charset="-120"/>
-              </a:rPr>
-              <a:t>20 s</a:t>
-            </a:r>
-            <a:endParaRPr lang="en-US" sz="1600" dirty="0"/>
-          </a:p>
-        </p:txBody>
-      </p:sp>
-      <p:sp>
-        <p:nvSpPr>
-          <p:cNvPr id="4" name="Text 2"/>
-          <p:cNvSpPr txBox="1"/>
-          <p:nvPr/>
-        </p:nvSpPr>
-        <p:spPr>
-          <a:xfrm>
-            <a:off x="548640" y="1051560"/>
-            <a:ext cx="11064240" cy="1691640"/>
-          </a:xfrm>
-          <a:prstGeom prst="rect">
-            <a:avLst/>
-          </a:prstGeom>
-          <a:noFill/>
-          <a:ln/>
-        </p:spPr>
-        <p:txBody>
-          <a:bodyPr wrap="square" lIns="0" tIns="0" rIns="0" bIns="0" rtlCol="0" anchor="ctr"/>
-          <a:lstStyle/>
-          <a:p>
-            <a:pPr algn="ctr" indent="0" marL="0">
-              <a:lnSpc>
-                <a:spcPts val="4800"/>
-              </a:lnSpc>
-              <a:buNone/>
-            </a:pPr>
-            <a:r>
-              <a:rPr lang="en-US" sz="4200" b="1" dirty="0">
-                <a:solidFill>
-                  <a:srgbClr val="FFFFFF"/>
-                </a:solidFill>
-                <a:latin typeface="Courier New" pitchFamily="34" charset="0"/>
-                <a:ea typeface="Courier New" pitchFamily="34" charset="-122"/>
-                <a:cs typeface="Courier New" pitchFamily="34" charset="-120"/>
-              </a:rPr>
-              <a:t>nom = input("Ton nom ? ")</a:t>
-            </a:r>
-            <a:endParaRPr lang="en-US" sz="4200" dirty="0"/>
-          </a:p>
-          <a:p>
-            <a:pPr algn="ctr" indent="0" marL="0">
-              <a:lnSpc>
-                <a:spcPts val="4800"/>
-              </a:lnSpc>
-              <a:buNone/>
-            </a:pPr>
-            <a:r>
-              <a:rPr lang="en-US" sz="4200" b="1" dirty="0">
-                <a:solidFill>
-                  <a:srgbClr val="FFFFFF"/>
-                </a:solidFill>
-                <a:latin typeface="Courier New" pitchFamily="34" charset="0"/>
-                <a:ea typeface="Courier New" pitchFamily="34" charset="-122"/>
-                <a:cs typeface="Courier New" pitchFamily="34" charset="-120"/>
-              </a:rPr>
-              <a:t>print("Bonjour " + Nom)</a:t>
-            </a:r>
-            <a:endParaRPr lang="en-US" sz="4200" dirty="0"/>
-          </a:p>
-        </p:txBody>
-      </p:sp>
-      <p:sp>
-        <p:nvSpPr>
-          <p:cNvPr id="5" name="Shape 3"/>
-          <p:cNvSpPr/>
-          <p:nvPr/>
-        </p:nvSpPr>
-        <p:spPr>
-          <a:xfrm>
-            <a:off x="548640" y="3063240"/>
-            <a:ext cx="5440680" cy="1463040"/>
-          </a:xfrm>
-          <a:prstGeom prst="roundRect">
-            <a:avLst>
-              <a:gd name="adj" fmla="val 5000"/>
-            </a:avLst>
-          </a:prstGeom>
-          <a:solidFill>
-            <a:srgbClr val="D7262B"/>
-          </a:solidFill>
-          <a:ln/>
-        </p:spPr>
-      </p:sp>
-      <p:sp>
-        <p:nvSpPr>
-          <p:cNvPr id="6" name="Text 4"/>
-          <p:cNvSpPr txBox="1"/>
-          <p:nvPr/>
-        </p:nvSpPr>
-        <p:spPr>
-          <a:xfrm>
-            <a:off x="777240" y="3474720"/>
-            <a:ext cx="640080" cy="640080"/>
-          </a:xfrm>
-          <a:prstGeom prst="rect">
-            <a:avLst/>
-          </a:prstGeom>
-          <a:noFill/>
-          <a:ln/>
-        </p:spPr>
-        <p:txBody>
-          <a:bodyPr wrap="square" lIns="0" tIns="0" rIns="0" bIns="0" rtlCol="0" anchor="t"/>
-          <a:lstStyle/>
-          <a:p>
-            <a:pPr algn="ctr" indent="0" marL="0">
-              <a:buNone/>
-            </a:pPr>
-            <a:r>
-              <a:rPr lang="en-US" sz="2400" dirty="0">
-                <a:solidFill>
-                  <a:srgbClr val="FFFFFF"/>
-                </a:solidFill>
-                <a:latin typeface="Calibri" pitchFamily="34" charset="0"/>
-                <a:ea typeface="Calibri" pitchFamily="34" charset="-122"/>
-                <a:cs typeface="Calibri" pitchFamily="34" charset="-120"/>
-              </a:rPr>
-              <a:t>▲</a:t>
-            </a:r>
-            <a:endParaRPr lang="en-US" sz="2400" dirty="0"/>
-          </a:p>
-        </p:txBody>
-      </p:sp>
-      <p:sp>
-        <p:nvSpPr>
-          <p:cNvPr id="7" name="Text 5"/>
-          <p:cNvSpPr txBox="1"/>
-          <p:nvPr/>
-        </p:nvSpPr>
-        <p:spPr>
-          <a:xfrm>
-            <a:off x="1508760" y="3246120"/>
-            <a:ext cx="4297680" cy="1097280"/>
-          </a:xfrm>
-          <a:prstGeom prst="rect">
-            <a:avLst/>
-          </a:prstGeom>
-          <a:noFill/>
-          <a:ln/>
-        </p:spPr>
-        <p:txBody>
-          <a:bodyPr wrap="square" lIns="0" tIns="0" rIns="0" bIns="0" rtlCol="0" anchor="ctr"/>
-          <a:lstStyle/>
-          <a:p>
-            <a:pPr indent="0" marL="0">
-              <a:lnSpc>
-                <a:spcPts val="2600"/>
-              </a:lnSpc>
-              <a:buNone/>
-            </a:pPr>
-            <a:r>
-              <a:rPr lang="en-US" sz="2300" b="1" dirty="0">
-                <a:solidFill>
-                  <a:srgbClr val="FFFFFF"/>
-                </a:solidFill>
-                <a:latin typeface="Calibri" pitchFamily="34" charset="0"/>
-                <a:ea typeface="Calibri" pitchFamily="34" charset="-122"/>
-                <a:cs typeface="Calibri" pitchFamily="34" charset="-120"/>
-              </a:rPr>
-              <a:t>Ça affiche le nom</a:t>
-            </a:r>
-            <a:endParaRPr lang="en-US" sz="2300" dirty="0"/>
-          </a:p>
-        </p:txBody>
-      </p:sp>
-      <p:sp>
-        <p:nvSpPr>
-          <p:cNvPr id="8" name="Shape 6"/>
-          <p:cNvSpPr/>
-          <p:nvPr/>
-        </p:nvSpPr>
-        <p:spPr>
-          <a:xfrm>
-            <a:off x="6172200" y="3063240"/>
-            <a:ext cx="5440680" cy="1463040"/>
-          </a:xfrm>
-          <a:prstGeom prst="roundRect">
-            <a:avLst>
-              <a:gd name="adj" fmla="val 5000"/>
-            </a:avLst>
-          </a:prstGeom>
-          <a:solidFill>
-            <a:srgbClr val="1F6FD0"/>
-          </a:solidFill>
-          <a:ln/>
-        </p:spPr>
-      </p:sp>
-      <p:sp>
-        <p:nvSpPr>
-          <p:cNvPr id="9" name="Text 7"/>
-          <p:cNvSpPr txBox="1"/>
-          <p:nvPr/>
-        </p:nvSpPr>
-        <p:spPr>
-          <a:xfrm>
-            <a:off x="6400800" y="3474720"/>
-            <a:ext cx="640080" cy="640080"/>
-          </a:xfrm>
-          <a:prstGeom prst="rect">
-            <a:avLst/>
-          </a:prstGeom>
-          <a:noFill/>
-          <a:ln/>
-        </p:spPr>
-        <p:txBody>
-          <a:bodyPr wrap="square" lIns="0" tIns="0" rIns="0" bIns="0" rtlCol="0" anchor="t"/>
-          <a:lstStyle/>
-          <a:p>
-            <a:pPr algn="ctr" indent="0" marL="0">
-              <a:buNone/>
-            </a:pPr>
-            <a:r>
-              <a:rPr lang="en-US" sz="2400" dirty="0">
-                <a:solidFill>
-                  <a:srgbClr val="FFFFFF"/>
-                </a:solidFill>
-                <a:latin typeface="Calibri" pitchFamily="34" charset="0"/>
-                <a:ea typeface="Calibri" pitchFamily="34" charset="-122"/>
-                <a:cs typeface="Calibri" pitchFamily="34" charset="-120"/>
-              </a:rPr>
-              <a:t>◆</a:t>
-            </a:r>
-            <a:endParaRPr lang="en-US" sz="2400" dirty="0"/>
-          </a:p>
-        </p:txBody>
-      </p:sp>
-      <p:sp>
-        <p:nvSpPr>
-          <p:cNvPr id="10" name="Text 8"/>
-          <p:cNvSpPr txBox="1"/>
-          <p:nvPr/>
-        </p:nvSpPr>
-        <p:spPr>
-          <a:xfrm>
-            <a:off x="7132320" y="3246120"/>
-            <a:ext cx="4297680" cy="1097280"/>
-          </a:xfrm>
-          <a:prstGeom prst="rect">
-            <a:avLst/>
-          </a:prstGeom>
-          <a:noFill/>
-          <a:ln/>
-        </p:spPr>
-        <p:txBody>
-          <a:bodyPr wrap="square" lIns="0" tIns="0" rIns="0" bIns="0" rtlCol="0" anchor="ctr"/>
-          <a:lstStyle/>
-          <a:p>
-            <a:pPr indent="0" marL="0">
-              <a:lnSpc>
-                <a:spcPts val="2600"/>
-              </a:lnSpc>
-              <a:buNone/>
-            </a:pPr>
-            <a:r>
-              <a:rPr lang="en-US" sz="2300" b="1" dirty="0">
-                <a:solidFill>
-                  <a:srgbClr val="FFFFFF"/>
-                </a:solidFill>
-                <a:latin typeface="Calibri" pitchFamily="34" charset="0"/>
-                <a:ea typeface="Calibri" pitchFamily="34" charset="-122"/>
-                <a:cs typeface="Calibri" pitchFamily="34" charset="-120"/>
-              </a:rPr>
-              <a:t>NameError</a:t>
-            </a:r>
-            <a:endParaRPr lang="en-US" sz="2300" dirty="0"/>
-          </a:p>
-        </p:txBody>
-      </p:sp>
-      <p:sp>
-        <p:nvSpPr>
-          <p:cNvPr id="11" name="Shape 9"/>
-          <p:cNvSpPr/>
-          <p:nvPr/>
-        </p:nvSpPr>
-        <p:spPr>
-          <a:xfrm>
-            <a:off x="548640" y="4754880"/>
-            <a:ext cx="5440680" cy="1463040"/>
-          </a:xfrm>
-          <a:prstGeom prst="roundRect">
-            <a:avLst>
-              <a:gd name="adj" fmla="val 5000"/>
-            </a:avLst>
-          </a:prstGeom>
-          <a:solidFill>
-            <a:srgbClr val="E8871E"/>
-          </a:solidFill>
-          <a:ln/>
-        </p:spPr>
-      </p:sp>
-      <p:sp>
-        <p:nvSpPr>
-          <p:cNvPr id="12" name="Text 10"/>
-          <p:cNvSpPr txBox="1"/>
-          <p:nvPr/>
-        </p:nvSpPr>
-        <p:spPr>
-          <a:xfrm>
-            <a:off x="777240" y="5166360"/>
-            <a:ext cx="640080" cy="640080"/>
-          </a:xfrm>
-          <a:prstGeom prst="rect">
-            <a:avLst/>
-          </a:prstGeom>
-          <a:noFill/>
-          <a:ln/>
-        </p:spPr>
-        <p:txBody>
-          <a:bodyPr wrap="square" lIns="0" tIns="0" rIns="0" bIns="0" rtlCol="0" anchor="t"/>
-          <a:lstStyle/>
-          <a:p>
-            <a:pPr algn="ctr" indent="0" marL="0">
-              <a:buNone/>
-            </a:pPr>
-            <a:r>
-              <a:rPr lang="en-US" sz="2400" dirty="0">
-                <a:solidFill>
-                  <a:srgbClr val="FFFFFF"/>
-                </a:solidFill>
-                <a:latin typeface="Calibri" pitchFamily="34" charset="0"/>
-                <a:ea typeface="Calibri" pitchFamily="34" charset="-122"/>
-                <a:cs typeface="Calibri" pitchFamily="34" charset="-120"/>
-              </a:rPr>
-              <a:t>●</a:t>
-            </a:r>
-            <a:endParaRPr lang="en-US" sz="2400" dirty="0"/>
-          </a:p>
-        </p:txBody>
-      </p:sp>
-      <p:sp>
-        <p:nvSpPr>
-          <p:cNvPr id="13" name="Text 11"/>
-          <p:cNvSpPr txBox="1"/>
-          <p:nvPr/>
-        </p:nvSpPr>
-        <p:spPr>
-          <a:xfrm>
-            <a:off x="1508760" y="4937760"/>
-            <a:ext cx="4297680" cy="1097280"/>
-          </a:xfrm>
-          <a:prstGeom prst="rect">
-            <a:avLst/>
-          </a:prstGeom>
-          <a:noFill/>
-          <a:ln/>
-        </p:spPr>
-        <p:txBody>
-          <a:bodyPr wrap="square" lIns="0" tIns="0" rIns="0" bIns="0" rtlCol="0" anchor="ctr"/>
-          <a:lstStyle/>
-          <a:p>
-            <a:pPr indent="0" marL="0">
-              <a:lnSpc>
-                <a:spcPts val="2600"/>
-              </a:lnSpc>
-              <a:buNone/>
-            </a:pPr>
-            <a:r>
-              <a:rPr lang="en-US" sz="2300" b="1" dirty="0">
-                <a:solidFill>
-                  <a:srgbClr val="FFFFFF"/>
-                </a:solidFill>
-                <a:latin typeface="Calibri" pitchFamily="34" charset="0"/>
-                <a:ea typeface="Calibri" pitchFamily="34" charset="-122"/>
-                <a:cs typeface="Calibri" pitchFamily="34" charset="-120"/>
-              </a:rPr>
-              <a:t>SyntaxError</a:t>
-            </a:r>
-            <a:endParaRPr lang="en-US" sz="2300" dirty="0"/>
-          </a:p>
-        </p:txBody>
-      </p:sp>
-      <p:sp>
-        <p:nvSpPr>
-          <p:cNvPr id="14" name="Shape 12"/>
-          <p:cNvSpPr/>
-          <p:nvPr/>
-        </p:nvSpPr>
-        <p:spPr>
-          <a:xfrm>
-            <a:off x="6172200" y="4754880"/>
-            <a:ext cx="5440680" cy="1463040"/>
-          </a:xfrm>
-          <a:prstGeom prst="roundRect">
-            <a:avLst>
-              <a:gd name="adj" fmla="val 5000"/>
-            </a:avLst>
-          </a:prstGeom>
-          <a:solidFill>
-            <a:srgbClr val="1E9E4A"/>
-          </a:solidFill>
-          <a:ln/>
-        </p:spPr>
-      </p:sp>
-      <p:sp>
-        <p:nvSpPr>
-          <p:cNvPr id="15" name="Text 13"/>
-          <p:cNvSpPr txBox="1"/>
-          <p:nvPr/>
-        </p:nvSpPr>
-        <p:spPr>
-          <a:xfrm>
-            <a:off x="6400800" y="5166360"/>
-            <a:ext cx="640080" cy="640080"/>
-          </a:xfrm>
-          <a:prstGeom prst="rect">
-            <a:avLst/>
-          </a:prstGeom>
-          <a:noFill/>
-          <a:ln/>
-        </p:spPr>
-        <p:txBody>
-          <a:bodyPr wrap="square" lIns="0" tIns="0" rIns="0" bIns="0" rtlCol="0" anchor="t"/>
-          <a:lstStyle/>
-          <a:p>
-            <a:pPr algn="ctr" indent="0" marL="0">
-              <a:buNone/>
-            </a:pPr>
-            <a:r>
-              <a:rPr lang="en-US" sz="2400" dirty="0">
-                <a:solidFill>
-                  <a:srgbClr val="FFFFFF"/>
-                </a:solidFill>
-                <a:latin typeface="Calibri" pitchFamily="34" charset="0"/>
-                <a:ea typeface="Calibri" pitchFamily="34" charset="-122"/>
-                <a:cs typeface="Calibri" pitchFamily="34" charset="-120"/>
-              </a:rPr>
-              <a:t>■</a:t>
-            </a:r>
-            <a:endParaRPr lang="en-US" sz="2400" dirty="0"/>
-          </a:p>
-        </p:txBody>
-      </p:sp>
-      <p:sp>
-        <p:nvSpPr>
-          <p:cNvPr id="16" name="Text 14"/>
-          <p:cNvSpPr txBox="1"/>
-          <p:nvPr/>
-        </p:nvSpPr>
-        <p:spPr>
-          <a:xfrm>
-            <a:off x="7132320" y="4937760"/>
-            <a:ext cx="4297680" cy="1097280"/>
-          </a:xfrm>
-          <a:prstGeom prst="rect">
-            <a:avLst/>
-          </a:prstGeom>
-          <a:noFill/>
-          <a:ln/>
-        </p:spPr>
-        <p:txBody>
-          <a:bodyPr wrap="square" lIns="0" tIns="0" rIns="0" bIns="0" rtlCol="0" anchor="ctr"/>
-          <a:lstStyle/>
-          <a:p>
-            <a:pPr indent="0" marL="0">
-              <a:lnSpc>
-                <a:spcPts val="2600"/>
-              </a:lnSpc>
-              <a:buNone/>
-            </a:pPr>
-            <a:r>
-              <a:rPr lang="en-US" sz="2300" b="1" dirty="0">
-                <a:solidFill>
-                  <a:srgbClr val="FFFFFF"/>
-                </a:solidFill>
-                <a:latin typeface="Calibri" pitchFamily="34" charset="0"/>
-                <a:ea typeface="Calibri" pitchFamily="34" charset="-122"/>
-                <a:cs typeface="Calibri" pitchFamily="34" charset="-120"/>
-              </a:rPr>
-              <a:t>Ça n'affiche rien</a:t>
-            </a:r>
-            <a:endParaRPr lang="en-US" sz="2300" dirty="0"/>
-          </a:p>
-        </p:txBody>
-      </p:sp>
-    </p:spTree>
-  </p:cSld>
-  <p:clrMapOvr>
-    <a:masterClrMapping/>
-  </p:clrMapOvr>
-</p:sld>
-</file>
-
-<file path=ppt/slides/slide17.xml><?xml version="1.0" encoding="utf-8"?>
-<p:sld xmlns:a="http://schemas.openxmlformats.org/drawingml/2006/main" xmlns:r="http://schemas.openxmlformats.org/officeDocument/2006/relationships" xmlns:p="http://schemas.openxmlformats.org/presentationml/2006/main">
-  <p:cSld name="Slide 17">
-    <p:bg>
-      <p:bgPr>
-        <a:solidFill>
-          <a:srgbClr val="12122A"/>
-        </a:solidFill>
-      </p:bgPr>
-    </p:bg>
-    <p:spTree>
-      <p:nvGrpSpPr>
-        <p:cNvPr id="1" name=""/>
-        <p:cNvGrpSpPr/>
-        <p:nvPr/>
-      </p:nvGrpSpPr>
-      <p:grpSpPr>
-        <a:xfrm>
-          <a:off x="0" y="0"/>
-          <a:ext cx="0" cy="0"/>
-          <a:chOff x="0" y="0"/>
-          <a:chExt cx="0" cy="0"/>
-        </a:xfrm>
-      </p:grpSpPr>
-      <p:sp>
-        <p:nvSpPr>
-          <p:cNvPr id="2" name="Text 0"/>
-          <p:cNvSpPr txBox="1"/>
-          <p:nvPr/>
-        </p:nvSpPr>
-        <p:spPr>
-          <a:xfrm>
-            <a:off x="548640" y="411480"/>
-            <a:ext cx="5486400" cy="457200"/>
-          </a:xfrm>
-          <a:prstGeom prst="rect">
-            <a:avLst/>
-          </a:prstGeom>
-          <a:noFill/>
-          <a:ln/>
-        </p:spPr>
-        <p:txBody>
-          <a:bodyPr wrap="square" lIns="0" tIns="0" rIns="0" bIns="0" rtlCol="0" anchor="t"/>
-          <a:lstStyle/>
-          <a:p>
-            <a:pPr indent="0" marL="0">
-              <a:buNone/>
-            </a:pPr>
-            <a:r>
-              <a:rPr lang="en-US" sz="1600" b="1" spc="300" kern="0" dirty="0">
-                <a:solidFill>
-                  <a:srgbClr val="2FB765"/>
-                </a:solidFill>
-                <a:latin typeface="Calibri" pitchFamily="34" charset="0"/>
-                <a:ea typeface="Calibri" pitchFamily="34" charset="-122"/>
-                <a:cs typeface="Calibri" pitchFamily="34" charset="-120"/>
-              </a:rPr>
-              <a:t>RÉPONSE 8</a:t>
-            </a:r>
-            <a:endParaRPr lang="en-US" sz="1600" dirty="0"/>
-          </a:p>
-        </p:txBody>
-      </p:sp>
-      <p:sp>
-        <p:nvSpPr>
-          <p:cNvPr id="3" name="Text 1"/>
-          <p:cNvSpPr txBox="1"/>
-          <p:nvPr/>
-        </p:nvSpPr>
-        <p:spPr>
-          <a:xfrm>
-            <a:off x="548640" y="960120"/>
-            <a:ext cx="11064240" cy="914400"/>
-          </a:xfrm>
-          <a:prstGeom prst="rect">
-            <a:avLst/>
-          </a:prstGeom>
-          <a:noFill/>
-          <a:ln/>
-        </p:spPr>
-        <p:txBody>
-          <a:bodyPr wrap="square" lIns="0" tIns="0" rIns="0" bIns="0" rtlCol="0" anchor="t"/>
-          <a:lstStyle/>
-          <a:p>
-            <a:pPr algn="ctr" indent="0" marL="0">
-              <a:buNone/>
-            </a:pPr>
-            <a:r>
-              <a:rPr lang="en-US" sz="2200" dirty="0">
-                <a:solidFill>
-                  <a:srgbClr val="A8A8C0"/>
-                </a:solidFill>
-                <a:latin typeface="Courier New" pitchFamily="34" charset="0"/>
-                <a:ea typeface="Courier New" pitchFamily="34" charset="-122"/>
-                <a:cs typeface="Courier New" pitchFamily="34" charset="-120"/>
-              </a:rPr>
-              <a:t>nom = input("Ton nom ? ")</a:t>
-            </a:r>
-            <a:endParaRPr lang="en-US" sz="2200" dirty="0"/>
-          </a:p>
-          <a:p>
-            <a:pPr algn="ctr" indent="0" marL="0">
-              <a:buNone/>
-            </a:pPr>
-            <a:r>
-              <a:rPr lang="en-US" sz="2200" dirty="0">
-                <a:solidFill>
-                  <a:srgbClr val="A8A8C0"/>
-                </a:solidFill>
-                <a:latin typeface="Courier New" pitchFamily="34" charset="0"/>
-                <a:ea typeface="Courier New" pitchFamily="34" charset="-122"/>
-                <a:cs typeface="Courier New" pitchFamily="34" charset="-120"/>
-              </a:rPr>
-              <a:t>print("Bonjour " + Nom)</a:t>
-            </a:r>
-            <a:endParaRPr lang="en-US" sz="2200" dirty="0"/>
-          </a:p>
-        </p:txBody>
-      </p:sp>
-      <p:sp>
-        <p:nvSpPr>
-          <p:cNvPr id="4" name="Shape 2"/>
-          <p:cNvSpPr/>
-          <p:nvPr/>
-        </p:nvSpPr>
-        <p:spPr>
-          <a:xfrm>
-            <a:off x="1463040" y="2103120"/>
-            <a:ext cx="9235440" cy="1691640"/>
-          </a:xfrm>
-          <a:prstGeom prst="roundRect">
-            <a:avLst>
-              <a:gd name="adj" fmla="val 5405"/>
-            </a:avLst>
-          </a:prstGeom>
-          <a:solidFill>
-            <a:srgbClr val="1F6FD0"/>
-          </a:solidFill>
-          <a:ln/>
-        </p:spPr>
-      </p:sp>
-      <p:sp>
-        <p:nvSpPr>
-          <p:cNvPr id="5" name="Text 3"/>
-          <p:cNvSpPr txBox="1"/>
-          <p:nvPr/>
-        </p:nvSpPr>
-        <p:spPr>
-          <a:xfrm>
-            <a:off x="1828800" y="2331720"/>
-            <a:ext cx="3657600" cy="457200"/>
-          </a:xfrm>
-          <a:prstGeom prst="rect">
-            <a:avLst/>
-          </a:prstGeom>
-          <a:noFill/>
-          <a:ln/>
-        </p:spPr>
-        <p:txBody>
-          <a:bodyPr wrap="square" lIns="0" tIns="0" rIns="0" bIns="0" rtlCol="0" anchor="t"/>
-          <a:lstStyle/>
-          <a:p>
-            <a:pPr indent="0" marL="0">
-              <a:buNone/>
-            </a:pPr>
-            <a:r>
-              <a:rPr lang="en-US" sz="1500" b="1" spc="200" kern="0" dirty="0">
-                <a:solidFill>
-                  <a:srgbClr val="FFFFFF"/>
-                </a:solidFill>
-                <a:latin typeface="Calibri" pitchFamily="34" charset="0"/>
-                <a:ea typeface="Calibri" pitchFamily="34" charset="-122"/>
-                <a:cs typeface="Calibri" pitchFamily="34" charset="-120"/>
-              </a:rPr>
-              <a:t>◆   BLEU</a:t>
-            </a:r>
-            <a:endParaRPr lang="en-US" sz="1500" dirty="0"/>
-          </a:p>
-        </p:txBody>
-      </p:sp>
-      <p:sp>
-        <p:nvSpPr>
-          <p:cNvPr id="6" name="Text 4"/>
-          <p:cNvSpPr txBox="1"/>
-          <p:nvPr/>
-        </p:nvSpPr>
-        <p:spPr>
-          <a:xfrm>
-            <a:off x="1828800" y="2743200"/>
-            <a:ext cx="8503920" cy="914400"/>
-          </a:xfrm>
-          <a:prstGeom prst="rect">
-            <a:avLst/>
-          </a:prstGeom>
-          <a:noFill/>
-          <a:ln/>
-        </p:spPr>
-        <p:txBody>
-          <a:bodyPr wrap="square" lIns="0" tIns="0" rIns="0" bIns="0" rtlCol="0" anchor="ctr"/>
-          <a:lstStyle/>
-          <a:p>
-            <a:pPr indent="0" marL="0">
-              <a:buNone/>
-            </a:pPr>
-            <a:r>
-              <a:rPr lang="en-US" sz="3600" b="1" dirty="0">
-                <a:solidFill>
-                  <a:srgbClr val="FFFFFF"/>
-                </a:solidFill>
-                <a:latin typeface="Calibri" pitchFamily="34" charset="0"/>
-                <a:ea typeface="Calibri" pitchFamily="34" charset="-122"/>
-                <a:cs typeface="Calibri" pitchFamily="34" charset="-120"/>
-              </a:rPr>
-              <a:t>NameError</a:t>
-            </a:r>
-            <a:endParaRPr lang="en-US" sz="3600" dirty="0"/>
-          </a:p>
-        </p:txBody>
-      </p:sp>
-      <p:sp>
-        <p:nvSpPr>
-          <p:cNvPr id="7" name="Text 5"/>
-          <p:cNvSpPr txBox="1"/>
-          <p:nvPr/>
-        </p:nvSpPr>
-        <p:spPr>
-          <a:xfrm>
-            <a:off x="9509760" y="2377440"/>
-            <a:ext cx="1005840" cy="1097280"/>
-          </a:xfrm>
-          <a:prstGeom prst="rect">
-            <a:avLst/>
-          </a:prstGeom>
-          <a:noFill/>
-          <a:ln/>
-        </p:spPr>
-        <p:txBody>
-          <a:bodyPr wrap="square" lIns="0" tIns="0" rIns="0" bIns="0" rtlCol="0" anchor="t"/>
-          <a:lstStyle/>
-          <a:p>
-            <a:pPr algn="ctr" indent="0" marL="0">
-              <a:buNone/>
-            </a:pPr>
-            <a:r>
-              <a:rPr lang="en-US" sz="4600" dirty="0">
-                <a:solidFill>
-                  <a:srgbClr val="FFFFFF"/>
-                </a:solidFill>
-                <a:latin typeface="Calibri" pitchFamily="34" charset="0"/>
-                <a:ea typeface="Calibri" pitchFamily="34" charset="-122"/>
-                <a:cs typeface="Calibri" pitchFamily="34" charset="-120"/>
-              </a:rPr>
-              <a:t>✔</a:t>
-            </a:r>
-            <a:endParaRPr lang="en-US" sz="4600" dirty="0"/>
-          </a:p>
-        </p:txBody>
-      </p:sp>
-      <p:sp>
-        <p:nvSpPr>
-          <p:cNvPr id="8" name="Shape 6"/>
-          <p:cNvSpPr/>
-          <p:nvPr/>
-        </p:nvSpPr>
-        <p:spPr>
-          <a:xfrm>
-            <a:off x="1463040" y="4114800"/>
-            <a:ext cx="9235440" cy="1737360"/>
-          </a:xfrm>
-          <a:prstGeom prst="roundRect">
-            <a:avLst>
-              <a:gd name="adj" fmla="val 4211"/>
-            </a:avLst>
-          </a:prstGeom>
-          <a:solidFill>
-            <a:srgbClr val="20204A"/>
-          </a:solidFill>
-          <a:ln/>
-        </p:spPr>
-      </p:sp>
-      <p:sp>
-        <p:nvSpPr>
-          <p:cNvPr id="9" name="Text 7"/>
-          <p:cNvSpPr txBox="1"/>
-          <p:nvPr/>
-        </p:nvSpPr>
-        <p:spPr>
-          <a:xfrm>
-            <a:off x="1828800" y="4343400"/>
-            <a:ext cx="5486400" cy="365760"/>
-          </a:xfrm>
-          <a:prstGeom prst="rect">
-            <a:avLst/>
-          </a:prstGeom>
-          <a:noFill/>
-          <a:ln/>
-        </p:spPr>
-        <p:txBody>
-          <a:bodyPr wrap="square" lIns="0" tIns="0" rIns="0" bIns="0" rtlCol="0" anchor="t"/>
-          <a:lstStyle/>
-          <a:p>
-            <a:pPr indent="0" marL="0">
-              <a:buNone/>
-            </a:pPr>
-            <a:r>
-              <a:rPr lang="en-US" sz="1300" b="1" spc="300" kern="0" dirty="0">
-                <a:solidFill>
-                  <a:srgbClr val="4FC3F7"/>
-                </a:solidFill>
-                <a:latin typeface="Calibri" pitchFamily="34" charset="0"/>
-                <a:ea typeface="Calibri" pitchFamily="34" charset="-122"/>
-                <a:cs typeface="Calibri" pitchFamily="34" charset="-120"/>
-              </a:rPr>
-              <a:t>POURQUOI</a:t>
-            </a:r>
-            <a:endParaRPr lang="en-US" sz="1300" dirty="0"/>
-          </a:p>
-        </p:txBody>
-      </p:sp>
-      <p:sp>
-        <p:nvSpPr>
-          <p:cNvPr id="10" name="Text 8"/>
-          <p:cNvSpPr txBox="1"/>
-          <p:nvPr/>
-        </p:nvSpPr>
-        <p:spPr>
-          <a:xfrm>
-            <a:off x="1828800" y="4754880"/>
-            <a:ext cx="8503920" cy="914400"/>
-          </a:xfrm>
-          <a:prstGeom prst="rect">
-            <a:avLst/>
-          </a:prstGeom>
-          <a:noFill/>
-          <a:ln/>
-        </p:spPr>
-        <p:txBody>
-          <a:bodyPr wrap="square" lIns="0" tIns="0" rIns="0" bIns="0" rtlCol="0" anchor="t"/>
-          <a:lstStyle/>
-          <a:p>
-            <a:pPr indent="0" marL="0">
-              <a:lnSpc>
-                <a:spcPts val="2600"/>
-              </a:lnSpc>
-              <a:buNone/>
-            </a:pPr>
-            <a:r>
-              <a:rPr lang="en-US" sz="2000" dirty="0">
-                <a:solidFill>
-                  <a:srgbClr val="FFFFFF"/>
-                </a:solidFill>
-                <a:latin typeface="Calibri" pitchFamily="34" charset="0"/>
-                <a:ea typeface="Calibri" pitchFamily="34" charset="-122"/>
-                <a:cs typeface="Calibri" pitchFamily="34" charset="-120"/>
-              </a:rPr>
-              <a:t>nom et Nom ne sont pas la même boîte. Python ne connaît pas Nom.</a:t>
-            </a:r>
-            <a:endParaRPr lang="en-US" sz="2000" dirty="0"/>
-          </a:p>
-        </p:txBody>
-      </p:sp>
-    </p:spTree>
-  </p:cSld>
-  <p:clrMapOvr>
-    <a:masterClrMapping/>
-  </p:clrMapOvr>
-</p:sld>
-</file>
-
-<file path=ppt/slides/slide18.xml><?xml version="1.0" encoding="utf-8"?>
-<p:sld xmlns:a="http://schemas.openxmlformats.org/drawingml/2006/main" xmlns:r="http://schemas.openxmlformats.org/officeDocument/2006/relationships" xmlns:p="http://schemas.openxmlformats.org/presentationml/2006/main">
-  <p:cSld name="Slide 18">
-    <p:bg>
-      <p:bgPr>
-        <a:solidFill>
-          <a:srgbClr val="12122A"/>
-        </a:solidFill>
-      </p:bgPr>
-    </p:bg>
-    <p:spTree>
-      <p:nvGrpSpPr>
-        <p:cNvPr id="1" name=""/>
-        <p:cNvGrpSpPr/>
-        <p:nvPr/>
-      </p:nvGrpSpPr>
-      <p:grpSpPr>
-        <a:xfrm>
-          <a:off x="0" y="0"/>
-          <a:ext cx="0" cy="0"/>
-          <a:chOff x="0" y="0"/>
-          <a:chExt cx="0" cy="0"/>
-        </a:xfrm>
-      </p:grpSpPr>
-      <p:sp>
-        <p:nvSpPr>
           <p:cNvPr id="2" name="Shape 0"/>
           <p:cNvSpPr/>
           <p:nvPr/>
@@ -7129,7 +4867,7 @@
               <a:buNone/>
             </a:pPr>
             <a:r>
-              <a:rPr lang="en-US" sz="5000" b="1" dirty="0">
+              <a:rPr lang="en-US" sz="4800" b="1" dirty="0">
                 <a:solidFill>
                   <a:srgbClr val="FFFFFF"/>
                 </a:solidFill>
@@ -7139,7 +4877,7 @@
               </a:rPr>
               <a:t>VOTRE JEU</a:t>
             </a:r>
-            <a:endParaRPr lang="en-US" sz="5000" dirty="0"/>
+            <a:endParaRPr lang="en-US" sz="4800" dirty="0"/>
           </a:p>
           <a:p>
             <a:pPr indent="0" marL="0">
@@ -7149,17 +4887,17 @@
               <a:buNone/>
             </a:pPr>
             <a:r>
-              <a:rPr lang="en-US" sz="5000" b="1" dirty="0">
-                <a:solidFill>
-                  <a:srgbClr val="FFFFFF"/>
-                </a:solidFill>
-                <a:latin typeface="Calibri" pitchFamily="34" charset="0"/>
-                <a:ea typeface="Calibri" pitchFamily="34" charset="-122"/>
-                <a:cs typeface="Calibri" pitchFamily="34" charset="-120"/>
-              </a:rPr>
-              <a:t>APPREND À COMPTER.</a:t>
-            </a:r>
-            <a:endParaRPr lang="en-US" sz="5000" dirty="0"/>
+              <a:rPr lang="en-US" sz="4800" b="1" dirty="0">
+                <a:solidFill>
+                  <a:srgbClr val="FFFFFF"/>
+                </a:solidFill>
+                <a:latin typeface="Calibri" pitchFamily="34" charset="0"/>
+                <a:ea typeface="Calibri" pitchFamily="34" charset="-122"/>
+                <a:cs typeface="Calibri" pitchFamily="34" charset="-120"/>
+              </a:rPr>
+              <a:t>COMPTE ET DÉCIDE.</a:t>
+            </a:r>
+            <a:endParaRPr lang="en-US" sz="4800" dirty="0"/>
           </a:p>
         </p:txBody>
       </p:sp>
@@ -7219,7 +4957,7 @@
                 <a:ea typeface="Calibri" pitchFamily="34" charset="-122"/>
                 <a:cs typeface="Calibri" pitchFamily="34" charset="-120"/>
               </a:rPr>
-              <a:t>Dans dix minutes, vous saurez pourquoi — et comment obtenir 7.</a:t>
+              <a:t>Dans cinq minutes, vous saurez pourquoi — et comment obtenir 7.</a:t>
             </a:r>
             <a:endParaRPr lang="en-US" sz="2000" dirty="0"/>
           </a:p>
@@ -7290,7 +5028,7 @@
                 <a:ea typeface="Calibri" pitchFamily="34" charset="-122"/>
                 <a:cs typeface="Calibri" pitchFamily="34" charset="-120"/>
               </a:rPr>
-              <a:t>QUESTION 1 / 8</a:t>
+              <a:t>QUESTION 1 / 6</a:t>
             </a:r>
             <a:endParaRPr lang="en-US" sz="1600" dirty="0"/>
           </a:p>
@@ -8261,7 +5999,7 @@
                 <a:ea typeface="Calibri" pitchFamily="34" charset="-122"/>
                 <a:cs typeface="Calibri" pitchFamily="34" charset="-120"/>
               </a:rPr>
-              <a:t>La deuxième ligne remplace le contenu. Une boîte ne garde qu'une seule chose.</a:t>
+              <a:t>La deuxieme ligne remplace le contenu. Une boite ne garde qu'une seule chose.</a:t>
             </a:r>
             <a:endParaRPr lang="en-US" sz="2000" dirty="0"/>
           </a:p>
@@ -8332,7 +6070,7 @@
                 <a:ea typeface="Calibri" pitchFamily="34" charset="-122"/>
                 <a:cs typeface="Calibri" pitchFamily="34" charset="-120"/>
               </a:rPr>
-              <a:t>QUESTION 2 / 8</a:t>
+              <a:t>QUESTION 2 / 6</a:t>
             </a:r>
             <a:endParaRPr lang="en-US" sz="1600" dirty="0"/>
           </a:p>
@@ -9359,7 +7097,7 @@
                 <a:ea typeface="Calibri" pitchFamily="34" charset="-122"/>
                 <a:cs typeface="Calibri" pitchFamily="34" charset="-120"/>
               </a:rPr>
-              <a:t>QUESTION 3 / 8</a:t>
+              <a:t>QUESTION 3 / 6</a:t>
             </a:r>
             <a:endParaRPr lang="en-US" sz="1600" dirty="0"/>
           </a:p>
@@ -9440,7 +7178,7 @@
                 <a:ea typeface="Courier New" pitchFamily="34" charset="-122"/>
                 <a:cs typeface="Courier New" pitchFamily="34" charset="-120"/>
               </a:rPr>
-              <a:t>a = 4</a:t>
+              <a:t>a = "X"</a:t>
             </a:r>
             <a:endParaRPr lang="en-US" sz="4200" dirty="0"/>
           </a:p>
@@ -9460,7 +7198,7 @@
                 <a:ea typeface="Courier New" pitchFamily="34" charset="-122"/>
                 <a:cs typeface="Courier New" pitchFamily="34" charset="-120"/>
               </a:rPr>
-              <a:t>b = 5</a:t>
+              <a:t>b = "O"</a:t>
             </a:r>
             <a:endParaRPr lang="en-US" sz="4200" dirty="0"/>
           </a:p>
@@ -9480,7 +7218,7 @@
                 <a:ea typeface="Courier New" pitchFamily="34" charset="-122"/>
                 <a:cs typeface="Courier New" pitchFamily="34" charset="-120"/>
               </a:rPr>
-              <a:t>b = a</a:t>
+              <a:t>a = b</a:t>
             </a:r>
             <a:endParaRPr lang="en-US" sz="4200" dirty="0"/>
           </a:p>
@@ -9500,7 +7238,47 @@
                 <a:ea typeface="Courier New" pitchFamily="34" charset="-122"/>
                 <a:cs typeface="Courier New" pitchFamily="34" charset="-120"/>
               </a:rPr>
+              <a:t>b = a</a:t>
+            </a:r>
+            <a:endParaRPr lang="en-US" sz="4200" dirty="0"/>
+          </a:p>
+          <a:p>
+            <a:pPr algn="ctr" indent="0" marL="0">
+              <a:lnSpc>
+                <a:spcPts val="4800"/>
+              </a:lnSpc>
+              <a:buNone/>
+            </a:pPr>
+            <a:r>
+              <a:rPr lang="en-US" sz="4200" b="1" dirty="0">
+                <a:solidFill>
+                  <a:srgbClr val="FFFFFF"/>
+                </a:solidFill>
+                <a:latin typeface="Courier New" pitchFamily="34" charset="0"/>
+                <a:ea typeface="Courier New" pitchFamily="34" charset="-122"/>
+                <a:cs typeface="Courier New" pitchFamily="34" charset="-120"/>
+              </a:rPr>
               <a:t>print(a)</a:t>
+            </a:r>
+            <a:endParaRPr lang="en-US" sz="4200" dirty="0"/>
+          </a:p>
+          <a:p>
+            <a:pPr algn="ctr" indent="0" marL="0">
+              <a:lnSpc>
+                <a:spcPts val="4800"/>
+              </a:lnSpc>
+              <a:buNone/>
+            </a:pPr>
+            <a:r>
+              <a:rPr lang="en-US" sz="4200" b="1" dirty="0">
+                <a:solidFill>
+                  <a:srgbClr val="FFFFFF"/>
+                </a:solidFill>
+                <a:latin typeface="Courier New" pitchFamily="34" charset="0"/>
+                <a:ea typeface="Courier New" pitchFamily="34" charset="-122"/>
+                <a:cs typeface="Courier New" pitchFamily="34" charset="-120"/>
+              </a:rPr>
+              <a:t>print(b)</a:t>
             </a:r>
             <a:endParaRPr lang="en-US" sz="4200" dirty="0"/>
           </a:p>
@@ -9603,7 +7381,7 @@
                 <a:ea typeface="Calibri" pitchFamily="34" charset="-122"/>
                 <a:cs typeface="Calibri" pitchFamily="34" charset="-120"/>
               </a:rPr>
-              <a:t>5</a:t>
+              <a:t>X puis O</a:t>
             </a:r>
             <a:endParaRPr lang="en-US" sz="2300" dirty="0"/>
           </a:p>
@@ -9706,7 +7484,7 @@
                 <a:ea typeface="Calibri" pitchFamily="34" charset="-122"/>
                 <a:cs typeface="Calibri" pitchFamily="34" charset="-120"/>
               </a:rPr>
-              <a:t>rien</a:t>
+              <a:t>O puis X</a:t>
             </a:r>
             <a:endParaRPr lang="en-US" sz="2300" dirty="0"/>
           </a:p>
@@ -9809,7 +7587,7 @@
                 <a:ea typeface="Calibri" pitchFamily="34" charset="-122"/>
                 <a:cs typeface="Calibri" pitchFamily="34" charset="-120"/>
               </a:rPr>
-              <a:t>4</a:t>
+              <a:t>X puis X</a:t>
             </a:r>
             <a:endParaRPr lang="en-US" sz="2300" dirty="0"/>
           </a:p>
@@ -9912,7 +7690,7 @@
                 <a:ea typeface="Calibri" pitchFamily="34" charset="-122"/>
                 <a:cs typeface="Calibri" pitchFamily="34" charset="-120"/>
               </a:rPr>
-              <a:t>9</a:t>
+              <a:t>O puis O</a:t>
             </a:r>
             <a:endParaRPr lang="en-US" sz="2300" dirty="0"/>
           </a:p>
@@ -10022,7 +7800,7 @@
                 <a:ea typeface="Courier New" pitchFamily="34" charset="-122"/>
                 <a:cs typeface="Courier New" pitchFamily="34" charset="-120"/>
               </a:rPr>
-              <a:t>a = 4</a:t>
+              <a:t>a = "X"</a:t>
             </a:r>
             <a:endParaRPr lang="en-US" sz="2200" dirty="0"/>
           </a:p>
@@ -10039,7 +7817,7 @@
                 <a:ea typeface="Courier New" pitchFamily="34" charset="-122"/>
                 <a:cs typeface="Courier New" pitchFamily="34" charset="-120"/>
               </a:rPr>
-              <a:t>b = 5</a:t>
+              <a:t>b = "O"</a:t>
             </a:r>
             <a:endParaRPr lang="en-US" sz="2200" dirty="0"/>
           </a:p>
@@ -10056,7 +7834,7 @@
                 <a:ea typeface="Courier New" pitchFamily="34" charset="-122"/>
                 <a:cs typeface="Courier New" pitchFamily="34" charset="-120"/>
               </a:rPr>
-              <a:t>b = a</a:t>
+              <a:t>a = b</a:t>
             </a:r>
             <a:endParaRPr lang="en-US" sz="2200" dirty="0"/>
           </a:p>
@@ -10073,7 +7851,41 @@
                 <a:ea typeface="Courier New" pitchFamily="34" charset="-122"/>
                 <a:cs typeface="Courier New" pitchFamily="34" charset="-120"/>
               </a:rPr>
+              <a:t>b = a</a:t>
+            </a:r>
+            <a:endParaRPr lang="en-US" sz="2200" dirty="0"/>
+          </a:p>
+          <a:p>
+            <a:pPr algn="ctr" indent="0" marL="0">
+              <a:buNone/>
+            </a:pPr>
+            <a:r>
+              <a:rPr lang="en-US" sz="2200" dirty="0">
+                <a:solidFill>
+                  <a:srgbClr val="A8A8C0"/>
+                </a:solidFill>
+                <a:latin typeface="Courier New" pitchFamily="34" charset="0"/>
+                <a:ea typeface="Courier New" pitchFamily="34" charset="-122"/>
+                <a:cs typeface="Courier New" pitchFamily="34" charset="-120"/>
+              </a:rPr>
               <a:t>print(a)</a:t>
+            </a:r>
+            <a:endParaRPr lang="en-US" sz="2200" dirty="0"/>
+          </a:p>
+          <a:p>
+            <a:pPr algn="ctr" indent="0" marL="0">
+              <a:buNone/>
+            </a:pPr>
+            <a:r>
+              <a:rPr lang="en-US" sz="2200" dirty="0">
+                <a:solidFill>
+                  <a:srgbClr val="A8A8C0"/>
+                </a:solidFill>
+                <a:latin typeface="Courier New" pitchFamily="34" charset="0"/>
+                <a:ea typeface="Courier New" pitchFamily="34" charset="-122"/>
+                <a:cs typeface="Courier New" pitchFamily="34" charset="-120"/>
+              </a:rPr>
+              <a:t>print(b)</a:t>
             </a:r>
             <a:endParaRPr lang="en-US" sz="2200" dirty="0"/>
           </a:p>
@@ -10096,7 +7908,7 @@
             </a:avLst>
           </a:prstGeom>
           <a:solidFill>
-            <a:srgbClr val="E8871E"/>
+            <a:srgbClr val="1E9E4A"/>
           </a:solidFill>
           <a:ln/>
         </p:spPr>
@@ -10134,7 +7946,7 @@
                 <a:ea typeface="Calibri" pitchFamily="34" charset="-122"/>
                 <a:cs typeface="Calibri" pitchFamily="34" charset="-120"/>
               </a:rPr>
-              <a:t>●   ORANGE</a:t>
+              <a:t>■   VERT</a:t>
             </a:r>
             <a:endParaRPr lang="en-US" sz="1500" dirty="0"/>
           </a:p>
@@ -10173,7 +7985,7 @@
                 <a:ea typeface="Calibri" pitchFamily="34" charset="-122"/>
                 <a:cs typeface="Calibri" pitchFamily="34" charset="-120"/>
               </a:rPr>
-              <a:t>4</a:t>
+              <a:t>O puis O</a:t>
             </a:r>
             <a:endParaRPr lang="en-US" sz="3600" dirty="0"/>
           </a:p>
@@ -10315,7 +8127,7 @@
                 <a:ea typeface="Calibri" pitchFamily="34" charset="-122"/>
                 <a:cs typeface="Calibri" pitchFamily="34" charset="-120"/>
               </a:rPr>
-              <a:t>a n'a jamais changé. Copier une boîte dans une autre ne vide pas la première.</a:t>
+              <a:t>Le piege : des a = b, le X est perdu. Pour echanger, il faut une troisieme boite.</a:t>
             </a:r>
             <a:endParaRPr lang="en-US" sz="2000" dirty="0"/>
           </a:p>
@@ -10386,7 +8198,7 @@
                 <a:ea typeface="Calibri" pitchFamily="34" charset="-122"/>
                 <a:cs typeface="Calibri" pitchFamily="34" charset="-120"/>
               </a:rPr>
-              <a:t>QUESTION 4 / 8</a:t>
+              <a:t>QUESTION 4 / 6</a:t>
             </a:r>
             <a:endParaRPr lang="en-US" sz="1600" dirty="0"/>
           </a:p>
@@ -10467,7 +8279,7 @@
                 <a:ea typeface="Courier New" pitchFamily="34" charset="-122"/>
                 <a:cs typeface="Courier New" pitchFamily="34" charset="-120"/>
               </a:rPr>
-              <a:t>a = "X"</a:t>
+              <a:t>nom = "Joyce"</a:t>
             </a:r>
             <a:endParaRPr lang="en-US" sz="4200" dirty="0"/>
           </a:p>
@@ -10487,87 +8299,7 @@
                 <a:ea typeface="Courier New" pitchFamily="34" charset="-122"/>
                 <a:cs typeface="Courier New" pitchFamily="34" charset="-120"/>
               </a:rPr>
-              <a:t>b = "O"</a:t>
-            </a:r>
-            <a:endParaRPr lang="en-US" sz="4200" dirty="0"/>
-          </a:p>
-          <a:p>
-            <a:pPr algn="ctr" indent="0" marL="0">
-              <a:lnSpc>
-                <a:spcPts val="4800"/>
-              </a:lnSpc>
-              <a:buNone/>
-            </a:pPr>
-            <a:r>
-              <a:rPr lang="en-US" sz="4200" b="1" dirty="0">
-                <a:solidFill>
-                  <a:srgbClr val="FFFFFF"/>
-                </a:solidFill>
-                <a:latin typeface="Courier New" pitchFamily="34" charset="0"/>
-                <a:ea typeface="Courier New" pitchFamily="34" charset="-122"/>
-                <a:cs typeface="Courier New" pitchFamily="34" charset="-120"/>
-              </a:rPr>
-              <a:t>a = b</a:t>
-            </a:r>
-            <a:endParaRPr lang="en-US" sz="4200" dirty="0"/>
-          </a:p>
-          <a:p>
-            <a:pPr algn="ctr" indent="0" marL="0">
-              <a:lnSpc>
-                <a:spcPts val="4800"/>
-              </a:lnSpc>
-              <a:buNone/>
-            </a:pPr>
-            <a:r>
-              <a:rPr lang="en-US" sz="4200" b="1" dirty="0">
-                <a:solidFill>
-                  <a:srgbClr val="FFFFFF"/>
-                </a:solidFill>
-                <a:latin typeface="Courier New" pitchFamily="34" charset="0"/>
-                <a:ea typeface="Courier New" pitchFamily="34" charset="-122"/>
-                <a:cs typeface="Courier New" pitchFamily="34" charset="-120"/>
-              </a:rPr>
-              <a:t>b = a</a:t>
-            </a:r>
-            <a:endParaRPr lang="en-US" sz="4200" dirty="0"/>
-          </a:p>
-          <a:p>
-            <a:pPr algn="ctr" indent="0" marL="0">
-              <a:lnSpc>
-                <a:spcPts val="4800"/>
-              </a:lnSpc>
-              <a:buNone/>
-            </a:pPr>
-            <a:r>
-              <a:rPr lang="en-US" sz="4200" b="1" dirty="0">
-                <a:solidFill>
-                  <a:srgbClr val="FFFFFF"/>
-                </a:solidFill>
-                <a:latin typeface="Courier New" pitchFamily="34" charset="0"/>
-                <a:ea typeface="Courier New" pitchFamily="34" charset="-122"/>
-                <a:cs typeface="Courier New" pitchFamily="34" charset="-120"/>
-              </a:rPr>
-              <a:t>print(a)</a:t>
-            </a:r>
-            <a:endParaRPr lang="en-US" sz="4200" dirty="0"/>
-          </a:p>
-          <a:p>
-            <a:pPr algn="ctr" indent="0" marL="0">
-              <a:lnSpc>
-                <a:spcPts val="4800"/>
-              </a:lnSpc>
-              <a:buNone/>
-            </a:pPr>
-            <a:r>
-              <a:rPr lang="en-US" sz="4200" b="1" dirty="0">
-                <a:solidFill>
-                  <a:srgbClr val="FFFFFF"/>
-                </a:solidFill>
-                <a:latin typeface="Courier New" pitchFamily="34" charset="0"/>
-                <a:ea typeface="Courier New" pitchFamily="34" charset="-122"/>
-                <a:cs typeface="Courier New" pitchFamily="34" charset="-120"/>
-              </a:rPr>
-              <a:t>print(b)</a:t>
+              <a:t>print("nom")</a:t>
             </a:r>
             <a:endParaRPr lang="en-US" sz="4200" dirty="0"/>
           </a:p>
@@ -10670,7 +8402,7 @@
                 <a:ea typeface="Calibri" pitchFamily="34" charset="-122"/>
                 <a:cs typeface="Calibri" pitchFamily="34" charset="-120"/>
               </a:rPr>
-              <a:t>X puis O</a:t>
+              <a:t>nom</a:t>
             </a:r>
             <a:endParaRPr lang="en-US" sz="2300" dirty="0"/>
           </a:p>
@@ -10773,7 +8505,7 @@
                 <a:ea typeface="Calibri" pitchFamily="34" charset="-122"/>
                 <a:cs typeface="Calibri" pitchFamily="34" charset="-120"/>
               </a:rPr>
-              <a:t>O puis X</a:t>
+              <a:t>Joyce</a:t>
             </a:r>
             <a:endParaRPr lang="en-US" sz="2300" dirty="0"/>
           </a:p>
@@ -10876,7 +8608,7 @@
                 <a:ea typeface="Calibri" pitchFamily="34" charset="-122"/>
                 <a:cs typeface="Calibri" pitchFamily="34" charset="-120"/>
               </a:rPr>
-              <a:t>X puis X</a:t>
+              <a:t>une erreur</a:t>
             </a:r>
             <a:endParaRPr lang="en-US" sz="2300" dirty="0"/>
           </a:p>
@@ -10979,7 +8711,7 @@
                 <a:ea typeface="Calibri" pitchFamily="34" charset="-122"/>
                 <a:cs typeface="Calibri" pitchFamily="34" charset="-120"/>
               </a:rPr>
-              <a:t>O puis O</a:t>
+              <a:t>rien</a:t>
             </a:r>
             <a:endParaRPr lang="en-US" sz="2300" dirty="0"/>
           </a:p>
@@ -11089,7 +8821,7 @@
                 <a:ea typeface="Courier New" pitchFamily="34" charset="-122"/>
                 <a:cs typeface="Courier New" pitchFamily="34" charset="-120"/>
               </a:rPr>
-              <a:t>a = "X"</a:t>
+              <a:t>nom = "Joyce"</a:t>
             </a:r>
             <a:endParaRPr lang="en-US" sz="2200" dirty="0"/>
           </a:p>
@@ -11106,75 +8838,7 @@
                 <a:ea typeface="Courier New" pitchFamily="34" charset="-122"/>
                 <a:cs typeface="Courier New" pitchFamily="34" charset="-120"/>
               </a:rPr>
-              <a:t>b = "O"</a:t>
-            </a:r>
-            <a:endParaRPr lang="en-US" sz="2200" dirty="0"/>
-          </a:p>
-          <a:p>
-            <a:pPr algn="ctr" indent="0" marL="0">
-              <a:buNone/>
-            </a:pPr>
-            <a:r>
-              <a:rPr lang="en-US" sz="2200" dirty="0">
-                <a:solidFill>
-                  <a:srgbClr val="A8A8C0"/>
-                </a:solidFill>
-                <a:latin typeface="Courier New" pitchFamily="34" charset="0"/>
-                <a:ea typeface="Courier New" pitchFamily="34" charset="-122"/>
-                <a:cs typeface="Courier New" pitchFamily="34" charset="-120"/>
-              </a:rPr>
-              <a:t>a = b</a:t>
-            </a:r>
-            <a:endParaRPr lang="en-US" sz="2200" dirty="0"/>
-          </a:p>
-          <a:p>
-            <a:pPr algn="ctr" indent="0" marL="0">
-              <a:buNone/>
-            </a:pPr>
-            <a:r>
-              <a:rPr lang="en-US" sz="2200" dirty="0">
-                <a:solidFill>
-                  <a:srgbClr val="A8A8C0"/>
-                </a:solidFill>
-                <a:latin typeface="Courier New" pitchFamily="34" charset="0"/>
-                <a:ea typeface="Courier New" pitchFamily="34" charset="-122"/>
-                <a:cs typeface="Courier New" pitchFamily="34" charset="-120"/>
-              </a:rPr>
-              <a:t>b = a</a:t>
-            </a:r>
-            <a:endParaRPr lang="en-US" sz="2200" dirty="0"/>
-          </a:p>
-          <a:p>
-            <a:pPr algn="ctr" indent="0" marL="0">
-              <a:buNone/>
-            </a:pPr>
-            <a:r>
-              <a:rPr lang="en-US" sz="2200" dirty="0">
-                <a:solidFill>
-                  <a:srgbClr val="A8A8C0"/>
-                </a:solidFill>
-                <a:latin typeface="Courier New" pitchFamily="34" charset="0"/>
-                <a:ea typeface="Courier New" pitchFamily="34" charset="-122"/>
-                <a:cs typeface="Courier New" pitchFamily="34" charset="-120"/>
-              </a:rPr>
-              <a:t>print(a)</a:t>
-            </a:r>
-            <a:endParaRPr lang="en-US" sz="2200" dirty="0"/>
-          </a:p>
-          <a:p>
-            <a:pPr algn="ctr" indent="0" marL="0">
-              <a:buNone/>
-            </a:pPr>
-            <a:r>
-              <a:rPr lang="en-US" sz="2200" dirty="0">
-                <a:solidFill>
-                  <a:srgbClr val="A8A8C0"/>
-                </a:solidFill>
-                <a:latin typeface="Courier New" pitchFamily="34" charset="0"/>
-                <a:ea typeface="Courier New" pitchFamily="34" charset="-122"/>
-                <a:cs typeface="Courier New" pitchFamily="34" charset="-120"/>
-              </a:rPr>
-              <a:t>print(b)</a:t>
+              <a:t>print("nom")</a:t>
             </a:r>
             <a:endParaRPr lang="en-US" sz="2200" dirty="0"/>
           </a:p>
@@ -11197,7 +8861,7 @@
             </a:avLst>
           </a:prstGeom>
           <a:solidFill>
-            <a:srgbClr val="1E9E4A"/>
+            <a:srgbClr val="D7262B"/>
           </a:solidFill>
           <a:ln/>
         </p:spPr>
@@ -11235,7 +8899,7 @@
                 <a:ea typeface="Calibri" pitchFamily="34" charset="-122"/>
                 <a:cs typeface="Calibri" pitchFamily="34" charset="-120"/>
               </a:rPr>
-              <a:t>■   VERT</a:t>
+              <a:t>▲   ROUGE</a:t>
             </a:r>
             <a:endParaRPr lang="en-US" sz="1500" dirty="0"/>
           </a:p>
@@ -11274,7 +8938,7 @@
                 <a:ea typeface="Calibri" pitchFamily="34" charset="-122"/>
                 <a:cs typeface="Calibri" pitchFamily="34" charset="-120"/>
               </a:rPr>
-              <a:t>O puis O</a:t>
+              <a:t>nom</a:t>
             </a:r>
             <a:endParaRPr lang="en-US" sz="3600" dirty="0"/>
           </a:p>
@@ -11416,7 +9080,7 @@
                 <a:ea typeface="Calibri" pitchFamily="34" charset="-122"/>
                 <a:cs typeface="Calibri" pitchFamily="34" charset="-120"/>
               </a:rPr>
-              <a:t>Le piège : dès a = b, le X est perdu. Pour échanger, il faut une troisième boîte.</a:t>
+              <a:t>Avec guillemets : le MOT. Sans guillemets : ce qu'il y a dans la boite.</a:t>
             </a:r>
             <a:endParaRPr lang="en-US" sz="2000" dirty="0"/>
           </a:p>
